--- a/ADG/_실측판/14장/14장_Broker모니터링과검증명령.pptx
+++ b/ADG/_실측판/14장/14장_Broker모니터링과검증명령.pptx
@@ -6823,7 +6823,45 @@
                 </a:solidFill>
                 <a:latin typeface="맑은 고딕"/>
               </a:rPr>
-              <a:t>•  `Gap Status: No Gap` — 7장 `V$ARCHIVE_GAP` 을 한 줄로</a:t>
+              <a:t>•  </a:t>
+            </a:r>
+            <a:r>
+              <a:rPr sz="1700" b="0">
+                <a:solidFill>
+                  <a:srgbClr val="222222"/>
+                </a:solidFill>
+                <a:latin typeface="Consolas"/>
+                <a:cs typeface="Consolas"/>
+              </a:rPr>
+              <a:t>Gap Status: No Gap</a:t>
+            </a:r>
+            <a:r>
+              <a:rPr sz="1700" b="0">
+                <a:solidFill>
+                  <a:srgbClr val="222222"/>
+                </a:solidFill>
+                <a:latin typeface="맑은 고딕"/>
+              </a:rPr>
+              <a:t> — 7장 </a:t>
+            </a:r>
+            <a:r>
+              <a:rPr sz="1700" b="0">
+                <a:solidFill>
+                  <a:srgbClr val="222222"/>
+                </a:solidFill>
+                <a:latin typeface="Consolas"/>
+                <a:cs typeface="Consolas"/>
+              </a:rPr>
+              <a:t>V$ARCHIVE_GAP</a:t>
+            </a:r>
+            <a:r>
+              <a:rPr sz="1700" b="0">
+                <a:solidFill>
+                  <a:srgbClr val="222222"/>
+                </a:solidFill>
+                <a:latin typeface="맑은 고딕"/>
+              </a:rPr>
+              <a:t> 을 한 줄로</a:t>
             </a:r>
           </a:p>
           <a:p>
@@ -6839,7 +6877,45 @@
                 </a:solidFill>
                 <a:latin typeface="맑은 고딕"/>
               </a:rPr>
-              <a:t>•  `Capacity` · `TEMP Files` (실측 3 / 3)</a:t>
+              <a:t>•  </a:t>
+            </a:r>
+            <a:r>
+              <a:rPr sz="1700" b="0">
+                <a:solidFill>
+                  <a:srgbClr val="222222"/>
+                </a:solidFill>
+                <a:latin typeface="Consolas"/>
+                <a:cs typeface="Consolas"/>
+              </a:rPr>
+              <a:t>Capacity</a:t>
+            </a:r>
+            <a:r>
+              <a:rPr sz="1700" b="0">
+                <a:solidFill>
+                  <a:srgbClr val="222222"/>
+                </a:solidFill>
+                <a:latin typeface="맑은 고딕"/>
+              </a:rPr>
+              <a:t> · </a:t>
+            </a:r>
+            <a:r>
+              <a:rPr sz="1700" b="0">
+                <a:solidFill>
+                  <a:srgbClr val="222222"/>
+                </a:solidFill>
+                <a:latin typeface="Consolas"/>
+                <a:cs typeface="Consolas"/>
+              </a:rPr>
+              <a:t>TEMP Files</a:t>
+            </a:r>
+            <a:r>
+              <a:rPr sz="1700" b="0">
+                <a:solidFill>
+                  <a:srgbClr val="222222"/>
+                </a:solidFill>
+                <a:latin typeface="맑은 고딕"/>
+              </a:rPr>
+              <a:t> (실측 3 / 3)</a:t>
             </a:r>
           </a:p>
           <a:p>
@@ -6855,7 +6931,26 @@
                 </a:solidFill>
                 <a:latin typeface="맑은 고딕"/>
               </a:rPr>
-              <a:t>•  `Current` 구성 — chicago 온라인 3 + boston SRL 4</a:t>
+              <a:t>•  </a:t>
+            </a:r>
+            <a:r>
+              <a:rPr sz="1700" b="0">
+                <a:solidFill>
+                  <a:srgbClr val="222222"/>
+                </a:solidFill>
+                <a:latin typeface="Consolas"/>
+                <a:cs typeface="Consolas"/>
+              </a:rPr>
+              <a:t>Current</a:t>
+            </a:r>
+            <a:r>
+              <a:rPr sz="1700" b="0">
+                <a:solidFill>
+                  <a:srgbClr val="222222"/>
+                </a:solidFill>
+                <a:latin typeface="맑은 고딕"/>
+              </a:rPr>
+              <a:t> 구성 — chicago 온라인 3 + boston SRL 4</a:t>
             </a:r>
           </a:p>
           <a:p>
@@ -6871,7 +6966,26 @@
                 </a:solidFill>
                 <a:latin typeface="맑은 고딕"/>
               </a:rPr>
-              <a:t>•  `Future` 구성 — boston 온라인 3 + chicago SRL 4</a:t>
+              <a:t>•  </a:t>
+            </a:r>
+            <a:r>
+              <a:rPr sz="1700" b="0">
+                <a:solidFill>
+                  <a:srgbClr val="222222"/>
+                </a:solidFill>
+                <a:latin typeface="Consolas"/>
+                <a:cs typeface="Consolas"/>
+              </a:rPr>
+              <a:t>Future</a:t>
+            </a:r>
+            <a:r>
+              <a:rPr sz="1700" b="0">
+                <a:solidFill>
+                  <a:srgbClr val="222222"/>
+                </a:solidFill>
+                <a:latin typeface="맑은 고딕"/>
+              </a:rPr>
+              <a:t> 구성 — boston 온라인 3 + chicago SRL 4</a:t>
             </a:r>
           </a:p>
           <a:p>
@@ -6887,7 +7001,25 @@
                 </a:solidFill>
                 <a:latin typeface="맑은 고딕"/>
               </a:rPr>
-              <a:t>•  양쪽 다 **Sufficient SRLs**, 크기 200MB 동일</a:t>
+              <a:t>•  양쪽 다 </a:t>
+            </a:r>
+            <a:r>
+              <a:rPr sz="1700" b="1">
+                <a:solidFill>
+                  <a:srgbClr val="222222"/>
+                </a:solidFill>
+                <a:latin typeface="맑은 고딕"/>
+              </a:rPr>
+              <a:t>Sufficient SRLs</a:t>
+            </a:r>
+            <a:r>
+              <a:rPr sz="1700" b="0">
+                <a:solidFill>
+                  <a:srgbClr val="222222"/>
+                </a:solidFill>
+                <a:latin typeface="맑은 고딕"/>
+              </a:rPr>
+              <a:t>, 크기 200MB 동일</a:t>
             </a:r>
           </a:p>
         </p:txBody>
@@ -7321,7 +7453,26 @@
                 </a:solidFill>
                 <a:latin typeface="맑은 고딕"/>
               </a:rPr>
-              <a:t>•  `StatusReport` — 인스턴스별 오류를 표로</a:t>
+              <a:t>•  </a:t>
+            </a:r>
+            <a:r>
+              <a:rPr sz="1700" b="0">
+                <a:solidFill>
+                  <a:srgbClr val="222222"/>
+                </a:solidFill>
+                <a:latin typeface="Consolas"/>
+                <a:cs typeface="Consolas"/>
+              </a:rPr>
+              <a:t>StatusReport</a:t>
+            </a:r>
+            <a:r>
+              <a:rPr sz="1700" b="0">
+                <a:solidFill>
+                  <a:srgbClr val="222222"/>
+                </a:solidFill>
+                <a:latin typeface="맑은 고딕"/>
+              </a:rPr>
+              <a:t> — 인스턴스별 오류를 표로</a:t>
             </a:r>
           </a:p>
           <a:p>
@@ -7337,7 +7488,36 @@
                 </a:solidFill>
                 <a:latin typeface="맑은 고딕"/>
               </a:rPr>
-              <a:t>•  `LogXptStatus` — Primary 에서 조회. 실측 `VALID`</a:t>
+              <a:t>•  </a:t>
+            </a:r>
+            <a:r>
+              <a:rPr sz="1700" b="0">
+                <a:solidFill>
+                  <a:srgbClr val="222222"/>
+                </a:solidFill>
+                <a:latin typeface="Consolas"/>
+                <a:cs typeface="Consolas"/>
+              </a:rPr>
+              <a:t>LogXptStatus</a:t>
+            </a:r>
+            <a:r>
+              <a:rPr sz="1700" b="0">
+                <a:solidFill>
+                  <a:srgbClr val="222222"/>
+                </a:solidFill>
+                <a:latin typeface="맑은 고딕"/>
+              </a:rPr>
+              <a:t> — Primary 에서 조회. 실측 </a:t>
+            </a:r>
+            <a:r>
+              <a:rPr sz="1700" b="0">
+                <a:solidFill>
+                  <a:srgbClr val="222222"/>
+                </a:solidFill>
+                <a:latin typeface="Consolas"/>
+                <a:cs typeface="Consolas"/>
+              </a:rPr>
+              <a:t>VALID</a:t>
             </a:r>
           </a:p>
           <a:p>
@@ -7353,7 +7533,45 @@
                 </a:solidFill>
                 <a:latin typeface="맑은 고딕"/>
               </a:rPr>
-              <a:t>•  `SendQEntries` / `RecvQEntries` — 두 개의 큐</a:t>
+              <a:t>•  </a:t>
+            </a:r>
+            <a:r>
+              <a:rPr sz="1700" b="0">
+                <a:solidFill>
+                  <a:srgbClr val="222222"/>
+                </a:solidFill>
+                <a:latin typeface="Consolas"/>
+                <a:cs typeface="Consolas"/>
+              </a:rPr>
+              <a:t>SendQEntries</a:t>
+            </a:r>
+            <a:r>
+              <a:rPr sz="1700" b="0">
+                <a:solidFill>
+                  <a:srgbClr val="222222"/>
+                </a:solidFill>
+                <a:latin typeface="맑은 고딕"/>
+              </a:rPr>
+              <a:t> / </a:t>
+            </a:r>
+            <a:r>
+              <a:rPr sz="1700" b="0">
+                <a:solidFill>
+                  <a:srgbClr val="222222"/>
+                </a:solidFill>
+                <a:latin typeface="Consolas"/>
+                <a:cs typeface="Consolas"/>
+              </a:rPr>
+              <a:t>RecvQEntries</a:t>
+            </a:r>
+            <a:r>
+              <a:rPr sz="1700" b="0">
+                <a:solidFill>
+                  <a:srgbClr val="222222"/>
+                </a:solidFill>
+                <a:latin typeface="맑은 고딕"/>
+              </a:rPr>
+              <a:t> — 두 개의 큐</a:t>
             </a:r>
           </a:p>
           <a:p>
@@ -7369,7 +7587,26 @@
                 </a:solidFill>
                 <a:latin typeface="맑은 고딕"/>
               </a:rPr>
-              <a:t>•  `TopWaitEvents` — 상위 대기 이벤트</a:t>
+              <a:t>•  </a:t>
+            </a:r>
+            <a:r>
+              <a:rPr sz="1700" b="0">
+                <a:solidFill>
+                  <a:srgbClr val="222222"/>
+                </a:solidFill>
+                <a:latin typeface="Consolas"/>
+                <a:cs typeface="Consolas"/>
+              </a:rPr>
+              <a:t>TopWaitEvents</a:t>
+            </a:r>
+            <a:r>
+              <a:rPr sz="1700" b="0">
+                <a:solidFill>
+                  <a:srgbClr val="222222"/>
+                </a:solidFill>
+                <a:latin typeface="맑은 고딕"/>
+              </a:rPr>
+              <a:t> — 상위 대기 이벤트</a:t>
             </a:r>
           </a:p>
           <a:p>
@@ -7385,7 +7622,26 @@
                 </a:solidFill>
                 <a:latin typeface="맑은 고딕"/>
               </a:rPr>
-              <a:t>•  `InconsistentProperties` — 메모리·SPFILE·Broker 비교</a:t>
+              <a:t>•  </a:t>
+            </a:r>
+            <a:r>
+              <a:rPr sz="1700" b="0">
+                <a:solidFill>
+                  <a:srgbClr val="222222"/>
+                </a:solidFill>
+                <a:latin typeface="Consolas"/>
+                <a:cs typeface="Consolas"/>
+              </a:rPr>
+              <a:t>InconsistentProperties</a:t>
+            </a:r>
+            <a:r>
+              <a:rPr sz="1700" b="0">
+                <a:solidFill>
+                  <a:srgbClr val="222222"/>
+                </a:solidFill>
+                <a:latin typeface="맑은 고딕"/>
+              </a:rPr>
+              <a:t> — 메모리·SPFILE·Broker 비교</a:t>
             </a:r>
           </a:p>
         </p:txBody>
@@ -7564,7 +7820,26 @@
                 </a:solidFill>
                 <a:latin typeface="맑은 고딕"/>
               </a:rPr>
-              <a:t>•  `SendQEntries` — 보낼 것이 남아 있는가 (Primary)</a:t>
+              <a:t>•  </a:t>
+            </a:r>
+            <a:r>
+              <a:rPr sz="1700" b="0">
+                <a:solidFill>
+                  <a:srgbClr val="222222"/>
+                </a:solidFill>
+                <a:latin typeface="Consolas"/>
+                <a:cs typeface="Consolas"/>
+              </a:rPr>
+              <a:t>SendQEntries</a:t>
+            </a:r>
+            <a:r>
+              <a:rPr sz="1700" b="0">
+                <a:solidFill>
+                  <a:srgbClr val="222222"/>
+                </a:solidFill>
+                <a:latin typeface="맑은 고딕"/>
+              </a:rPr>
+              <a:t> — 보낼 것이 남아 있는가 (Primary)</a:t>
             </a:r>
           </a:p>
           <a:p>
@@ -7580,7 +7855,26 @@
                 </a:solidFill>
                 <a:latin typeface="맑은 고딕"/>
               </a:rPr>
-              <a:t>•  `RecvQEntries` — 받았지만 적용 못 한 것 (Standby)</a:t>
+              <a:t>•  </a:t>
+            </a:r>
+            <a:r>
+              <a:rPr sz="1700" b="0">
+                <a:solidFill>
+                  <a:srgbClr val="222222"/>
+                </a:solidFill>
+                <a:latin typeface="Consolas"/>
+                <a:cs typeface="Consolas"/>
+              </a:rPr>
+              <a:t>RecvQEntries</a:t>
+            </a:r>
+            <a:r>
+              <a:rPr sz="1700" b="0">
+                <a:solidFill>
+                  <a:srgbClr val="222222"/>
+                </a:solidFill>
+                <a:latin typeface="맑은 고딕"/>
+              </a:rPr>
+              <a:t> — 받았지만 적용 못 한 것 (Standby)</a:t>
             </a:r>
           </a:p>
           <a:p>
@@ -7596,7 +7890,54 @@
                 </a:solidFill>
                 <a:latin typeface="맑은 고딕"/>
               </a:rPr>
-              <a:t>•  실측 — SendQ `STATUS=CURRENT` `LOG_SEQ 69` **6,911KB**</a:t>
+              <a:t>•  실측 — SendQ </a:t>
+            </a:r>
+            <a:r>
+              <a:rPr sz="1700" b="0">
+                <a:solidFill>
+                  <a:srgbClr val="222222"/>
+                </a:solidFill>
+                <a:latin typeface="Consolas"/>
+                <a:cs typeface="Consolas"/>
+              </a:rPr>
+              <a:t>STATUS=CURRENT</a:t>
+            </a:r>
+            <a:r>
+              <a:rPr sz="1700" b="0">
+                <a:solidFill>
+                  <a:srgbClr val="222222"/>
+                </a:solidFill>
+                <a:latin typeface="맑은 고딕"/>
+              </a:rPr>
+              <a:t> </a:t>
+            </a:r>
+            <a:r>
+              <a:rPr sz="1700" b="0">
+                <a:solidFill>
+                  <a:srgbClr val="222222"/>
+                </a:solidFill>
+                <a:latin typeface="Consolas"/>
+                <a:cs typeface="Consolas"/>
+              </a:rPr>
+              <a:t>LOG_SEQ 69</a:t>
+            </a:r>
+            <a:r>
+              <a:rPr sz="1700" b="0">
+                <a:solidFill>
+                  <a:srgbClr val="222222"/>
+                </a:solidFill>
+                <a:latin typeface="맑은 고딕"/>
+              </a:rPr>
+              <a:t> </a:t>
+            </a:r>
+            <a:r>
+              <a:rPr sz="1700" b="1">
+                <a:solidFill>
+                  <a:srgbClr val="222222"/>
+                </a:solidFill>
+                <a:latin typeface="맑은 고딕"/>
+              </a:rPr>
+              <a:t>6,911KB</a:t>
             </a:r>
           </a:p>
           <a:p>
@@ -7791,7 +8132,16 @@
                 </a:solidFill>
                 <a:latin typeface="맑은 고딕"/>
               </a:rPr>
-              <a:t>•  SendQ 비었거나 CURRENT + RecvQ 비었음 → **정상**</a:t>
+              <a:t>•  SendQ 비었거나 CURRENT + RecvQ 비었음 → </a:t>
+            </a:r>
+            <a:r>
+              <a:rPr sz="1700" b="1">
+                <a:solidFill>
+                  <a:srgbClr val="222222"/>
+                </a:solidFill>
+                <a:latin typeface="맑은 고딕"/>
+              </a:rPr>
+              <a:t>정상</a:t>
             </a:r>
           </a:p>
           <a:p>
@@ -7807,7 +8157,16 @@
                 </a:solidFill>
                 <a:latin typeface="맑은 고딕"/>
               </a:rPr>
-              <a:t>•  SendQ 쌓임 + RecvQ 비었음 → **전송이 막혔다**</a:t>
+              <a:t>•  SendQ 쌓임 + RecvQ 비었음 → </a:t>
+            </a:r>
+            <a:r>
+              <a:rPr sz="1700" b="1">
+                <a:solidFill>
+                  <a:srgbClr val="222222"/>
+                </a:solidFill>
+                <a:latin typeface="맑은 고딕"/>
+              </a:rPr>
+              <a:t>전송이 막혔다</a:t>
             </a:r>
           </a:p>
           <a:p>
@@ -7823,7 +8182,16 @@
                 </a:solidFill>
                 <a:latin typeface="맑은 고딕"/>
               </a:rPr>
-              <a:t>•  SendQ 비었음 + RecvQ 쌓임 → **적용이 막혔다**</a:t>
+              <a:t>•  SendQ 비었음 + RecvQ 쌓임 → </a:t>
+            </a:r>
+            <a:r>
+              <a:rPr sz="1700" b="1">
+                <a:solidFill>
+                  <a:srgbClr val="222222"/>
+                </a:solidFill>
+                <a:latin typeface="맑은 고딕"/>
+              </a:rPr>
+              <a:t>적용이 막혔다</a:t>
             </a:r>
           </a:p>
           <a:p>
@@ -7839,7 +8207,16 @@
                 </a:solidFill>
                 <a:latin typeface="맑은 고딕"/>
               </a:rPr>
-              <a:t>•  둘 다 쌓임 → 양쪽 문제이거나 **Standby 가 멈췄다**</a:t>
+              <a:t>•  둘 다 쌓임 → 양쪽 문제이거나 </a:t>
+            </a:r>
+            <a:r>
+              <a:rPr sz="1700" b="1">
+                <a:solidFill>
+                  <a:srgbClr val="222222"/>
+                </a:solidFill>
+                <a:latin typeface="맑은 고딕"/>
+              </a:rPr>
+              <a:t>Standby 가 멈췄다</a:t>
             </a:r>
           </a:p>
         </p:txBody>
@@ -8018,7 +8395,26 @@
                 </a:solidFill>
                 <a:latin typeface="맑은 고딕"/>
               </a:rPr>
-              <a:t>•  `rdbms ipc message` 8,006,598 — 유휴</a:t>
+              <a:t>•  </a:t>
+            </a:r>
+            <a:r>
+              <a:rPr sz="1700" b="0">
+                <a:solidFill>
+                  <a:srgbClr val="222222"/>
+                </a:solidFill>
+                <a:latin typeface="Consolas"/>
+                <a:cs typeface="Consolas"/>
+              </a:rPr>
+              <a:t>rdbms ipc message</a:t>
+            </a:r>
+            <a:r>
+              <a:rPr sz="1700" b="0">
+                <a:solidFill>
+                  <a:srgbClr val="222222"/>
+                </a:solidFill>
+                <a:latin typeface="맑은 고딕"/>
+              </a:rPr>
+              <a:t> 8,006,598 — 유휴</a:t>
             </a:r>
           </a:p>
           <a:p>
@@ -8034,7 +8430,26 @@
                 </a:solidFill>
                 <a:latin typeface="맑은 고딕"/>
               </a:rPr>
-              <a:t>•  `PX Idle Wait` 2,912,212 — 유휴</a:t>
+              <a:t>•  </a:t>
+            </a:r>
+            <a:r>
+              <a:rPr sz="1700" b="0">
+                <a:solidFill>
+                  <a:srgbClr val="222222"/>
+                </a:solidFill>
+                <a:latin typeface="Consolas"/>
+                <a:cs typeface="Consolas"/>
+              </a:rPr>
+              <a:t>PX Idle Wait</a:t>
+            </a:r>
+            <a:r>
+              <a:rPr sz="1700" b="0">
+                <a:solidFill>
+                  <a:srgbClr val="222222"/>
+                </a:solidFill>
+                <a:latin typeface="맑은 고딕"/>
+              </a:rPr>
+              <a:t> 2,912,212 — 유휴</a:t>
             </a:r>
           </a:p>
           <a:p>
@@ -8050,7 +8465,26 @@
                 </a:solidFill>
                 <a:latin typeface="맑은 고딕"/>
               </a:rPr>
-              <a:t>•  `Space Manager: slave idle wait` — 유휴</a:t>
+              <a:t>•  </a:t>
+            </a:r>
+            <a:r>
+              <a:rPr sz="1700" b="0">
+                <a:solidFill>
+                  <a:srgbClr val="222222"/>
+                </a:solidFill>
+                <a:latin typeface="Consolas"/>
+                <a:cs typeface="Consolas"/>
+              </a:rPr>
+              <a:t>Space Manager: slave idle wait</a:t>
+            </a:r>
+            <a:r>
+              <a:rPr sz="1700" b="0">
+                <a:solidFill>
+                  <a:srgbClr val="222222"/>
+                </a:solidFill>
+                <a:latin typeface="맑은 고딕"/>
+              </a:rPr>
+              <a:t> — 유휴</a:t>
             </a:r>
           </a:p>
           <a:p>
@@ -8066,7 +8500,26 @@
                 </a:solidFill>
                 <a:latin typeface="맑은 고딕"/>
               </a:rPr>
-              <a:t>•  `parallel recovery slave next change` — 적용 관련이나 대기</a:t>
+              <a:t>•  </a:t>
+            </a:r>
+            <a:r>
+              <a:rPr sz="1700" b="0">
+                <a:solidFill>
+                  <a:srgbClr val="222222"/>
+                </a:solidFill>
+                <a:latin typeface="Consolas"/>
+                <a:cs typeface="Consolas"/>
+              </a:rPr>
+              <a:t>parallel recovery slave next change</a:t>
+            </a:r>
+            <a:r>
+              <a:rPr sz="1700" b="0">
+                <a:solidFill>
+                  <a:srgbClr val="222222"/>
+                </a:solidFill>
+                <a:latin typeface="맑은 고딕"/>
+              </a:rPr>
+              <a:t> — 적용 관련이나 대기</a:t>
             </a:r>
           </a:p>
           <a:p>
@@ -8082,7 +8535,16 @@
                 </a:solidFill>
                 <a:latin typeface="맑은 고딕"/>
               </a:rPr>
-              <a:t>•  **절대값이 아니라 평소와의 차이를 본다**</a:t>
+              <a:t>•  </a:t>
+            </a:r>
+            <a:r>
+              <a:rPr sz="1700" b="1">
+                <a:solidFill>
+                  <a:srgbClr val="222222"/>
+                </a:solidFill>
+                <a:latin typeface="맑은 고딕"/>
+              </a:rPr>
+              <a:t>절대값이 아니라 평소와의 차이를 본다</a:t>
             </a:r>
           </a:p>
         </p:txBody>
@@ -8261,7 +8723,17 @@
                 </a:solidFill>
                 <a:latin typeface="맑은 고딕"/>
               </a:rPr>
-              <a:t>•  `edit database 'boston' set property 'TopWaitEvents'='5';`</a:t>
+              <a:t>•  </a:t>
+            </a:r>
+            <a:r>
+              <a:rPr sz="1700" b="0">
+                <a:solidFill>
+                  <a:srgbClr val="222222"/>
+                </a:solidFill>
+                <a:latin typeface="Consolas"/>
+                <a:cs typeface="Consolas"/>
+              </a:rPr>
+              <a:t>edit database 'boston' set property 'TopWaitEvents'='5';</a:t>
             </a:r>
           </a:p>
           <a:p>
@@ -8277,7 +8749,17 @@
                 </a:solidFill>
                 <a:latin typeface="맑은 고딕"/>
               </a:rPr>
-              <a:t>•  → **`Error: ORA-16568: cannot set property`**</a:t>
+              <a:t>•  → </a:t>
+            </a:r>
+            <a:r>
+              <a:rPr sz="1700" b="1">
+                <a:solidFill>
+                  <a:srgbClr val="222222"/>
+                </a:solidFill>
+                <a:latin typeface="Consolas"/>
+                <a:cs typeface="Consolas"/>
+              </a:rPr>
+              <a:t>Error: ORA-16568: cannot set property</a:t>
             </a:r>
           </a:p>
           <a:p>
@@ -8293,7 +8775,26 @@
                 </a:solidFill>
                 <a:latin typeface="맑은 고딕"/>
               </a:rPr>
-              <a:t>•  `ORA-16538` 속성 이름이 없다</a:t>
+              <a:t>•  </a:t>
+            </a:r>
+            <a:r>
+              <a:rPr sz="1700" b="0">
+                <a:solidFill>
+                  <a:srgbClr val="222222"/>
+                </a:solidFill>
+                <a:latin typeface="Consolas"/>
+                <a:cs typeface="Consolas"/>
+              </a:rPr>
+              <a:t>ORA-16538</a:t>
+            </a:r>
+            <a:r>
+              <a:rPr sz="1700" b="0">
+                <a:solidFill>
+                  <a:srgbClr val="222222"/>
+                </a:solidFill>
+                <a:latin typeface="맑은 고딕"/>
+              </a:rPr>
+              <a:t> 속성 이름이 없다</a:t>
             </a:r>
           </a:p>
           <a:p>
@@ -8309,7 +8810,26 @@
                 </a:solidFill>
                 <a:latin typeface="맑은 고딕"/>
               </a:rPr>
-              <a:t>•  `ORA-16790` 값이 틀렸다</a:t>
+              <a:t>•  </a:t>
+            </a:r>
+            <a:r>
+              <a:rPr sz="1700" b="0">
+                <a:solidFill>
+                  <a:srgbClr val="222222"/>
+                </a:solidFill>
+                <a:latin typeface="Consolas"/>
+                <a:cs typeface="Consolas"/>
+              </a:rPr>
+              <a:t>ORA-16790</a:t>
+            </a:r>
+            <a:r>
+              <a:rPr sz="1700" b="0">
+                <a:solidFill>
+                  <a:srgbClr val="222222"/>
+                </a:solidFill>
+                <a:latin typeface="맑은 고딕"/>
+              </a:rPr>
+              <a:t> 값이 틀렸다</a:t>
             </a:r>
           </a:p>
           <a:p>
@@ -8325,7 +8845,35 @@
                 </a:solidFill>
                 <a:latin typeface="맑은 고딕"/>
               </a:rPr>
-              <a:t>•  `ORA-16568` 있는데 **설정할 수 없다**</a:t>
+              <a:t>•  </a:t>
+            </a:r>
+            <a:r>
+              <a:rPr sz="1700" b="0">
+                <a:solidFill>
+                  <a:srgbClr val="222222"/>
+                </a:solidFill>
+                <a:latin typeface="Consolas"/>
+                <a:cs typeface="Consolas"/>
+              </a:rPr>
+              <a:t>ORA-16568</a:t>
+            </a:r>
+            <a:r>
+              <a:rPr sz="1700" b="0">
+                <a:solidFill>
+                  <a:srgbClr val="222222"/>
+                </a:solidFill>
+                <a:latin typeface="맑은 고딕"/>
+              </a:rPr>
+              <a:t> 있는데 </a:t>
+            </a:r>
+            <a:r>
+              <a:rPr sz="1700" b="1">
+                <a:solidFill>
+                  <a:srgbClr val="222222"/>
+                </a:solidFill>
+                <a:latin typeface="맑은 고딕"/>
+              </a:rPr>
+              <a:t>설정할 수 없다</a:t>
             </a:r>
           </a:p>
         </p:txBody>
@@ -8759,7 +9307,44 @@
                 </a:solidFill>
                 <a:latin typeface="맑은 고딕"/>
               </a:rPr>
-              <a:t>•  `ApplyLagThreshold` → **ORA-16853** 적용이 늦다</a:t>
+              <a:t>•  </a:t>
+            </a:r>
+            <a:r>
+              <a:rPr sz="1700" b="0">
+                <a:solidFill>
+                  <a:srgbClr val="222222"/>
+                </a:solidFill>
+                <a:latin typeface="Consolas"/>
+                <a:cs typeface="Consolas"/>
+              </a:rPr>
+              <a:t>ApplyLagThreshold</a:t>
+            </a:r>
+            <a:r>
+              <a:rPr sz="1700" b="0">
+                <a:solidFill>
+                  <a:srgbClr val="222222"/>
+                </a:solidFill>
+                <a:latin typeface="맑은 고딕"/>
+              </a:rPr>
+              <a:t> → </a:t>
+            </a:r>
+            <a:r>
+              <a:rPr sz="1700" b="1">
+                <a:solidFill>
+                  <a:srgbClr val="222222"/>
+                </a:solidFill>
+                <a:latin typeface="맑은 고딕"/>
+              </a:rPr>
+              <a:t>ORA-16853</a:t>
+            </a:r>
+            <a:r>
+              <a:rPr sz="1700" b="0">
+                <a:solidFill>
+                  <a:srgbClr val="222222"/>
+                </a:solidFill>
+                <a:latin typeface="맑은 고딕"/>
+              </a:rPr>
+              <a:t> 적용이 늦다</a:t>
             </a:r>
           </a:p>
           <a:p>
@@ -8775,7 +9360,44 @@
                 </a:solidFill>
                 <a:latin typeface="맑은 고딕"/>
               </a:rPr>
-              <a:t>•  `TransportLagThreshold` → **ORA-16855** 전송이 늦다</a:t>
+              <a:t>•  </a:t>
+            </a:r>
+            <a:r>
+              <a:rPr sz="1700" b="0">
+                <a:solidFill>
+                  <a:srgbClr val="222222"/>
+                </a:solidFill>
+                <a:latin typeface="Consolas"/>
+                <a:cs typeface="Consolas"/>
+              </a:rPr>
+              <a:t>TransportLagThreshold</a:t>
+            </a:r>
+            <a:r>
+              <a:rPr sz="1700" b="0">
+                <a:solidFill>
+                  <a:srgbClr val="222222"/>
+                </a:solidFill>
+                <a:latin typeface="맑은 고딕"/>
+              </a:rPr>
+              <a:t> → </a:t>
+            </a:r>
+            <a:r>
+              <a:rPr sz="1700" b="1">
+                <a:solidFill>
+                  <a:srgbClr val="222222"/>
+                </a:solidFill>
+                <a:latin typeface="맑은 고딕"/>
+              </a:rPr>
+              <a:t>ORA-16855</a:t>
+            </a:r>
+            <a:r>
+              <a:rPr sz="1700" b="0">
+                <a:solidFill>
+                  <a:srgbClr val="222222"/>
+                </a:solidFill>
+                <a:latin typeface="맑은 고딕"/>
+              </a:rPr>
+              <a:t> 전송이 늦다</a:t>
             </a:r>
           </a:p>
           <a:p>
@@ -8791,7 +9413,44 @@
                 </a:solidFill>
                 <a:latin typeface="맑은 고딕"/>
               </a:rPr>
-              <a:t>•  `TransportDisconnectedThreshold` → **ORA-16857** 연결이 끊겼다</a:t>
+              <a:t>•  </a:t>
+            </a:r>
+            <a:r>
+              <a:rPr sz="1700" b="0">
+                <a:solidFill>
+                  <a:srgbClr val="222222"/>
+                </a:solidFill>
+                <a:latin typeface="Consolas"/>
+                <a:cs typeface="Consolas"/>
+              </a:rPr>
+              <a:t>TransportDisconnectedThreshold</a:t>
+            </a:r>
+            <a:r>
+              <a:rPr sz="1700" b="0">
+                <a:solidFill>
+                  <a:srgbClr val="222222"/>
+                </a:solidFill>
+                <a:latin typeface="맑은 고딕"/>
+              </a:rPr>
+              <a:t> → </a:t>
+            </a:r>
+            <a:r>
+              <a:rPr sz="1700" b="1">
+                <a:solidFill>
+                  <a:srgbClr val="222222"/>
+                </a:solidFill>
+                <a:latin typeface="맑은 고딕"/>
+              </a:rPr>
+              <a:t>ORA-16857</a:t>
+            </a:r>
+            <a:r>
+              <a:rPr sz="1700" b="0">
+                <a:solidFill>
+                  <a:srgbClr val="222222"/>
+                </a:solidFill>
+                <a:latin typeface="맑은 고딕"/>
+              </a:rPr>
+              <a:t> 연결이 끊겼다</a:t>
             </a:r>
           </a:p>
           <a:p>
@@ -8986,7 +9645,17 @@
                 </a:solidFill>
                 <a:latin typeface="맑은 고딕"/>
               </a:rPr>
-              <a:t>•  `edit database 'boston' set property 'DelayMins'='2'`</a:t>
+              <a:t>•  </a:t>
+            </a:r>
+            <a:r>
+              <a:rPr sz="1700" b="0">
+                <a:solidFill>
+                  <a:srgbClr val="222222"/>
+                </a:solidFill>
+                <a:latin typeface="Consolas"/>
+                <a:cs typeface="Consolas"/>
+              </a:rPr>
+              <a:t>edit database 'boston' set property 'DelayMins'='2'</a:t>
             </a:r>
           </a:p>
           <a:p>
@@ -9002,7 +9671,25 @@
                 </a:solidFill>
                 <a:latin typeface="맑은 고딕"/>
               </a:rPr>
-              <a:t>•  transport lag **0** — 리두는 이미 도착했다</a:t>
+              <a:t>•  transport lag </a:t>
+            </a:r>
+            <a:r>
+              <a:rPr sz="1700" b="1">
+                <a:solidFill>
+                  <a:srgbClr val="222222"/>
+                </a:solidFill>
+                <a:latin typeface="맑은 고딕"/>
+              </a:rPr>
+              <a:t>0</a:t>
+            </a:r>
+            <a:r>
+              <a:rPr sz="1700" b="0">
+                <a:solidFill>
+                  <a:srgbClr val="222222"/>
+                </a:solidFill>
+                <a:latin typeface="맑은 고딕"/>
+              </a:rPr>
+              <a:t> — 리두는 이미 도착했다</a:t>
             </a:r>
           </a:p>
           <a:p>
@@ -9018,7 +9705,25 @@
                 </a:solidFill>
                 <a:latin typeface="맑은 고딕"/>
               </a:rPr>
-              <a:t>•  apply lag **1분 33초** — 적용을 일부러 미룬다</a:t>
+              <a:t>•  apply lag </a:t>
+            </a:r>
+            <a:r>
+              <a:rPr sz="1700" b="1">
+                <a:solidFill>
+                  <a:srgbClr val="222222"/>
+                </a:solidFill>
+                <a:latin typeface="맑은 고딕"/>
+              </a:rPr>
+              <a:t>1분 33초</a:t>
+            </a:r>
+            <a:r>
+              <a:rPr sz="1700" b="0">
+                <a:solidFill>
+                  <a:srgbClr val="222222"/>
+                </a:solidFill>
+                <a:latin typeface="맑은 고딕"/>
+              </a:rPr>
+              <a:t> — 적용을 일부러 미룬다</a:t>
             </a:r>
           </a:p>
           <a:p>
@@ -9034,7 +9739,17 @@
                 </a:solidFill>
                 <a:latin typeface="맑은 고딕"/>
               </a:rPr>
-              <a:t>•  `Database Warning(s): ORA-16853`</a:t>
+              <a:t>•  </a:t>
+            </a:r>
+            <a:r>
+              <a:rPr sz="1700" b="0">
+                <a:solidFill>
+                  <a:srgbClr val="222222"/>
+                </a:solidFill>
+                <a:latin typeface="Consolas"/>
+                <a:cs typeface="Consolas"/>
+              </a:rPr>
+              <a:t>Database Warning(s): ORA-16853</a:t>
             </a:r>
           </a:p>
           <a:p>
@@ -9050,7 +9765,16 @@
                 </a:solidFill>
                 <a:latin typeface="맑은 고딕"/>
               </a:rPr>
-              <a:t>•  Database Status: **WARNING**</a:t>
+              <a:t>•  Database Status: </a:t>
+            </a:r>
+            <a:r>
+              <a:rPr sz="1700" b="1">
+                <a:solidFill>
+                  <a:srgbClr val="222222"/>
+                </a:solidFill>
+                <a:latin typeface="맑은 고딕"/>
+              </a:rPr>
+              <a:t>WARNING</a:t>
             </a:r>
           </a:p>
         </p:txBody>
@@ -9190,7 +9914,45 @@
                 </a:solidFill>
                 <a:latin typeface="맑은 고딕"/>
               </a:rPr>
-              <a:t>•  `SHOW` 와 `VALIDATE` 가 각각 어떤 질문에 답하는지 구별한다.</a:t>
+              <a:t>•  </a:t>
+            </a:r>
+            <a:r>
+              <a:rPr sz="1600" b="0">
+                <a:solidFill>
+                  <a:srgbClr val="222222"/>
+                </a:solidFill>
+                <a:latin typeface="Consolas"/>
+                <a:cs typeface="Consolas"/>
+              </a:rPr>
+              <a:t>SHOW</a:t>
+            </a:r>
+            <a:r>
+              <a:rPr sz="1600" b="0">
+                <a:solidFill>
+                  <a:srgbClr val="222222"/>
+                </a:solidFill>
+                <a:latin typeface="맑은 고딕"/>
+              </a:rPr>
+              <a:t> 와 </a:t>
+            </a:r>
+            <a:r>
+              <a:rPr sz="1600" b="0">
+                <a:solidFill>
+                  <a:srgbClr val="222222"/>
+                </a:solidFill>
+                <a:latin typeface="Consolas"/>
+                <a:cs typeface="Consolas"/>
+              </a:rPr>
+              <a:t>VALIDATE</a:t>
+            </a:r>
+            <a:r>
+              <a:rPr sz="1600" b="0">
+                <a:solidFill>
+                  <a:srgbClr val="222222"/>
+                </a:solidFill>
+                <a:latin typeface="맑은 고딕"/>
+              </a:rPr>
+              <a:t> 가 각각 어떤 질문에 답하는지 구별한다.</a:t>
             </a:r>
           </a:p>
           <a:p>
@@ -9206,7 +9968,26 @@
                 </a:solidFill>
                 <a:latin typeface="맑은 고딕"/>
               </a:rPr>
-              <a:t>•  전송이 끊겼는데 `SUCCESS` 가 나오는 상황을 실측으로 확인한다.</a:t>
+              <a:t>•  전송이 끊겼는데 </a:t>
+            </a:r>
+            <a:r>
+              <a:rPr sz="1600" b="0">
+                <a:solidFill>
+                  <a:srgbClr val="222222"/>
+                </a:solidFill>
+                <a:latin typeface="Consolas"/>
+                <a:cs typeface="Consolas"/>
+              </a:rPr>
+              <a:t>SUCCESS</a:t>
+            </a:r>
+            <a:r>
+              <a:rPr sz="1600" b="0">
+                <a:solidFill>
+                  <a:srgbClr val="222222"/>
+                </a:solidFill>
+                <a:latin typeface="맑은 고딕"/>
+              </a:rPr>
+              <a:t> 가 나오는 상황을 실측으로 확인한다.</a:t>
             </a:r>
           </a:p>
           <a:p>
@@ -9254,7 +10035,26 @@
                 </a:solidFill>
                 <a:latin typeface="맑은 고딕"/>
               </a:rPr>
-              <a:t>•  `DelayMins` 가 사는 것과 파는 것을 설명한다.</a:t>
+              <a:t>•  </a:t>
+            </a:r>
+            <a:r>
+              <a:rPr sz="1600" b="0">
+                <a:solidFill>
+                  <a:srgbClr val="222222"/>
+                </a:solidFill>
+                <a:latin typeface="Consolas"/>
+                <a:cs typeface="Consolas"/>
+              </a:rPr>
+              <a:t>DelayMins</a:t>
+            </a:r>
+            <a:r>
+              <a:rPr sz="1600" b="0">
+                <a:solidFill>
+                  <a:srgbClr val="222222"/>
+                </a:solidFill>
+                <a:latin typeface="맑은 고딕"/>
+              </a:rPr>
+              <a:t> 가 사는 것과 파는 것을 설명한다.</a:t>
             </a:r>
           </a:p>
           <a:p>
@@ -9481,7 +10281,26 @@
                 </a:solidFill>
                 <a:latin typeface="맑은 고딕"/>
               </a:rPr>
-              <a:t>•  `Ready for Switchover:` No</a:t>
+              <a:t>•  </a:t>
+            </a:r>
+            <a:r>
+              <a:rPr sz="1700" b="0">
+                <a:solidFill>
+                  <a:srgbClr val="222222"/>
+                </a:solidFill>
+                <a:latin typeface="Consolas"/>
+                <a:cs typeface="Consolas"/>
+              </a:rPr>
+              <a:t>Ready for Switchover:</a:t>
+            </a:r>
+            <a:r>
+              <a:rPr sz="1700" b="0">
+                <a:solidFill>
+                  <a:srgbClr val="222222"/>
+                </a:solidFill>
+                <a:latin typeface="맑은 고딕"/>
+              </a:rPr>
+              <a:t> No</a:t>
             </a:r>
           </a:p>
           <a:p>
@@ -9497,7 +10316,17 @@
                 </a:solidFill>
                 <a:latin typeface="맑은 고딕"/>
               </a:rPr>
-              <a:t>•  `Error: Switchover to this standby is not possible`</a:t>
+              <a:t>•  </a:t>
+            </a:r>
+            <a:r>
+              <a:rPr sz="1700" b="0">
+                <a:solidFill>
+                  <a:srgbClr val="222222"/>
+                </a:solidFill>
+                <a:latin typeface="Consolas"/>
+                <a:cs typeface="Consolas"/>
+              </a:rPr>
+              <a:t>Error: Switchover to this standby is not possible</a:t>
             </a:r>
           </a:p>
           <a:p>
@@ -9513,7 +10342,17 @@
                 </a:solidFill>
                 <a:latin typeface="맑은 고딕"/>
               </a:rPr>
-              <a:t>•  `because an apply delay has been set`</a:t>
+              <a:t>•  </a:t>
+            </a:r>
+            <a:r>
+              <a:rPr sz="1700" b="0">
+                <a:solidFill>
+                  <a:srgbClr val="222222"/>
+                </a:solidFill>
+                <a:latin typeface="Consolas"/>
+                <a:cs typeface="Consolas"/>
+              </a:rPr>
+              <a:t>because an apply delay has been set</a:t>
             </a:r>
           </a:p>
           <a:p>
@@ -9529,7 +10368,17 @@
                 </a:solidFill>
                 <a:latin typeface="맑은 고딕"/>
               </a:rPr>
-              <a:t>•  `Apply Delay: 2 minutes`</a:t>
+              <a:t>•  </a:t>
+            </a:r>
+            <a:r>
+              <a:rPr sz="1700" b="0">
+                <a:solidFill>
+                  <a:srgbClr val="222222"/>
+                </a:solidFill>
+                <a:latin typeface="Consolas"/>
+                <a:cs typeface="Consolas"/>
+              </a:rPr>
+              <a:t>Apply Delay: 2 minutes</a:t>
             </a:r>
           </a:p>
           <a:p>
@@ -9545,7 +10394,25 @@
                 </a:solidFill>
                 <a:latin typeface="맑은 고딕"/>
               </a:rPr>
-              <a:t>•  DelayMins 는 Apply / Transport **양쪽 표**에 나온다</a:t>
+              <a:t>•  DelayMins 는 Apply / Transport </a:t>
+            </a:r>
+            <a:r>
+              <a:rPr sz="1700" b="1">
+                <a:solidFill>
+                  <a:srgbClr val="222222"/>
+                </a:solidFill>
+                <a:latin typeface="맑은 고딕"/>
+              </a:rPr>
+              <a:t>양쪽 표</a:t>
+            </a:r>
+            <a:r>
+              <a:rPr sz="1700" b="0">
+                <a:solidFill>
+                  <a:srgbClr val="222222"/>
+                </a:solidFill>
+                <a:latin typeface="맑은 고딕"/>
+              </a:rPr>
+              <a:t>에 나온다</a:t>
             </a:r>
           </a:p>
         </p:txBody>
@@ -9724,7 +10591,35 @@
                 </a:solidFill>
                 <a:latin typeface="맑은 고딕"/>
               </a:rPr>
-              <a:t>•  `LogShipping=OFF` → SUCCESS. **경보 없음**</a:t>
+              <a:t>•  </a:t>
+            </a:r>
+            <a:r>
+              <a:rPr sz="1700" b="0">
+                <a:solidFill>
+                  <a:srgbClr val="222222"/>
+                </a:solidFill>
+                <a:latin typeface="Consolas"/>
+                <a:cs typeface="Consolas"/>
+              </a:rPr>
+              <a:t>LogShipping=OFF</a:t>
+            </a:r>
+            <a:r>
+              <a:rPr sz="1700" b="0">
+                <a:solidFill>
+                  <a:srgbClr val="222222"/>
+                </a:solidFill>
+                <a:latin typeface="맑은 고딕"/>
+              </a:rPr>
+              <a:t> → SUCCESS. </a:t>
+            </a:r>
+            <a:r>
+              <a:rPr sz="1700" b="1">
+                <a:solidFill>
+                  <a:srgbClr val="222222"/>
+                </a:solidFill>
+                <a:latin typeface="맑은 고딕"/>
+              </a:rPr>
+              <a:t>경보 없음</a:t>
             </a:r>
           </a:p>
           <a:p>
@@ -9740,7 +10635,35 @@
                 </a:solidFill>
                 <a:latin typeface="맑은 고딕"/>
               </a:rPr>
-              <a:t>•  `DelayMins=2` → WARNING. **경보 있음**</a:t>
+              <a:t>•  </a:t>
+            </a:r>
+            <a:r>
+              <a:rPr sz="1700" b="0">
+                <a:solidFill>
+                  <a:srgbClr val="222222"/>
+                </a:solidFill>
+                <a:latin typeface="Consolas"/>
+                <a:cs typeface="Consolas"/>
+              </a:rPr>
+              <a:t>DelayMins=2</a:t>
+            </a:r>
+            <a:r>
+              <a:rPr sz="1700" b="0">
+                <a:solidFill>
+                  <a:srgbClr val="222222"/>
+                </a:solidFill>
+                <a:latin typeface="맑은 고딕"/>
+              </a:rPr>
+              <a:t> → WARNING. </a:t>
+            </a:r>
+            <a:r>
+              <a:rPr sz="1700" b="1">
+                <a:solidFill>
+                  <a:srgbClr val="222222"/>
+                </a:solidFill>
+                <a:latin typeface="맑은 고딕"/>
+              </a:rPr>
+              <a:t>경보 있음</a:t>
             </a:r>
           </a:p>
           <a:p>
@@ -9772,7 +10695,16 @@
                 </a:solidFill>
                 <a:latin typeface="맑은 고딕"/>
               </a:rPr>
-              <a:t>•  차이 = **비교할 숫자 기준이 있는가**</a:t>
+              <a:t>•  차이 = </a:t>
+            </a:r>
+            <a:r>
+              <a:rPr sz="1700" b="1">
+                <a:solidFill>
+                  <a:srgbClr val="222222"/>
+                </a:solidFill>
+                <a:latin typeface="맑은 고딕"/>
+              </a:rPr>
+              <a:t>비교할 숫자 기준이 있는가</a:t>
             </a:r>
           </a:p>
         </p:txBody>
@@ -9951,7 +10883,45 @@
                 </a:solidFill>
                 <a:latin typeface="맑은 고딕"/>
               </a:rPr>
-              <a:t>•  `DelayMins=2` + `ApplyLagThreshold=30` → 즉시 ORA-16853</a:t>
+              <a:t>•  </a:t>
+            </a:r>
+            <a:r>
+              <a:rPr sz="1700" b="0">
+                <a:solidFill>
+                  <a:srgbClr val="222222"/>
+                </a:solidFill>
+                <a:latin typeface="Consolas"/>
+                <a:cs typeface="Consolas"/>
+              </a:rPr>
+              <a:t>DelayMins=2</a:t>
+            </a:r>
+            <a:r>
+              <a:rPr sz="1700" b="0">
+                <a:solidFill>
+                  <a:srgbClr val="222222"/>
+                </a:solidFill>
+                <a:latin typeface="맑은 고딕"/>
+              </a:rPr>
+              <a:t> + </a:t>
+            </a:r>
+            <a:r>
+              <a:rPr sz="1700" b="0">
+                <a:solidFill>
+                  <a:srgbClr val="222222"/>
+                </a:solidFill>
+                <a:latin typeface="Consolas"/>
+                <a:cs typeface="Consolas"/>
+              </a:rPr>
+              <a:t>ApplyLagThreshold=30</a:t>
+            </a:r>
+            <a:r>
+              <a:rPr sz="1700" b="0">
+                <a:solidFill>
+                  <a:srgbClr val="222222"/>
+                </a:solidFill>
+                <a:latin typeface="맑은 고딕"/>
+              </a:rPr>
+              <a:t> → 즉시 ORA-16853</a:t>
             </a:r>
           </a:p>
           <a:p>
@@ -9967,7 +10937,16 @@
                 </a:solidFill>
                 <a:latin typeface="맑은 고딕"/>
               </a:rPr>
-              <a:t>•  임계값을 10 으로 낮추자 구성 전체가 **WARNING**</a:t>
+              <a:t>•  임계값을 10 으로 낮추자 구성 전체가 </a:t>
+            </a:r>
+            <a:r>
+              <a:rPr sz="1700" b="1">
+                <a:solidFill>
+                  <a:srgbClr val="222222"/>
+                </a:solidFill>
+                <a:latin typeface="맑은 고딕"/>
+              </a:rPr>
+              <a:t>WARNING</a:t>
             </a:r>
           </a:p>
           <a:p>
@@ -9983,7 +10962,35 @@
                 </a:solidFill>
                 <a:latin typeface="맑은 고딕"/>
               </a:rPr>
-              <a:t>•  `DelayMins=30` 이면 임계값은 **30분보다 넉넉하게**</a:t>
+              <a:t>•  </a:t>
+            </a:r>
+            <a:r>
+              <a:rPr sz="1700" b="0">
+                <a:solidFill>
+                  <a:srgbClr val="222222"/>
+                </a:solidFill>
+                <a:latin typeface="Consolas"/>
+                <a:cs typeface="Consolas"/>
+              </a:rPr>
+              <a:t>DelayMins=30</a:t>
+            </a:r>
+            <a:r>
+              <a:rPr sz="1700" b="0">
+                <a:solidFill>
+                  <a:srgbClr val="222222"/>
+                </a:solidFill>
+                <a:latin typeface="맑은 고딕"/>
+              </a:rPr>
+              <a:t> 이면 임계값은 </a:t>
+            </a:r>
+            <a:r>
+              <a:rPr sz="1700" b="1">
+                <a:solidFill>
+                  <a:srgbClr val="222222"/>
+                </a:solidFill>
+                <a:latin typeface="맑은 고딕"/>
+              </a:rPr>
+              <a:t>30분보다 넉넉하게</a:t>
             </a:r>
           </a:p>
           <a:p>
@@ -10433,7 +11440,26 @@
                 </a:solidFill>
                 <a:latin typeface="맑은 고딕"/>
               </a:rPr>
-              <a:t>•  `SEVERITY` — Informational / Control / Warning</a:t>
+              <a:t>•  </a:t>
+            </a:r>
+            <a:r>
+              <a:rPr sz="1700" b="0">
+                <a:solidFill>
+                  <a:srgbClr val="222222"/>
+                </a:solidFill>
+                <a:latin typeface="Consolas"/>
+                <a:cs typeface="Consolas"/>
+              </a:rPr>
+              <a:t>SEVERITY</a:t>
+            </a:r>
+            <a:r>
+              <a:rPr sz="1700" b="0">
+                <a:solidFill>
+                  <a:srgbClr val="222222"/>
+                </a:solidFill>
+                <a:latin typeface="맑은 고딕"/>
+              </a:rPr>
+              <a:t> — Informational / Control / Warning</a:t>
             </a:r>
           </a:p>
           <a:p>
@@ -10449,7 +11475,35 @@
                 </a:solidFill>
                 <a:latin typeface="맑은 고딕"/>
               </a:rPr>
-              <a:t>•  실측 `SRL selected for T-1.S-69 for LAD:2` 가 **Warning**</a:t>
+              <a:t>•  실측 </a:t>
+            </a:r>
+            <a:r>
+              <a:rPr sz="1700" b="0">
+                <a:solidFill>
+                  <a:srgbClr val="222222"/>
+                </a:solidFill>
+                <a:latin typeface="Consolas"/>
+                <a:cs typeface="Consolas"/>
+              </a:rPr>
+              <a:t>SRL selected for T-1.S-69 for LAD:2</a:t>
+            </a:r>
+            <a:r>
+              <a:rPr sz="1700" b="0">
+                <a:solidFill>
+                  <a:srgbClr val="222222"/>
+                </a:solidFill>
+                <a:latin typeface="맑은 고딕"/>
+              </a:rPr>
+              <a:t> 가 </a:t>
+            </a:r>
+            <a:r>
+              <a:rPr sz="1700" b="1">
+                <a:solidFill>
+                  <a:srgbClr val="222222"/>
+                </a:solidFill>
+                <a:latin typeface="맑은 고딕"/>
+              </a:rPr>
+              <a:t>Warning</a:t>
             </a:r>
           </a:p>
           <a:p>
@@ -10465,7 +11519,35 @@
                 </a:solidFill>
                 <a:latin typeface="맑은 고딕"/>
               </a:rPr>
-              <a:t>•  그런데 `ERROR_CODE` 는 **0**</a:t>
+              <a:t>•  그런데 </a:t>
+            </a:r>
+            <a:r>
+              <a:rPr sz="1700" b="0">
+                <a:solidFill>
+                  <a:srgbClr val="222222"/>
+                </a:solidFill>
+                <a:latin typeface="Consolas"/>
+                <a:cs typeface="Consolas"/>
+              </a:rPr>
+              <a:t>ERROR_CODE</a:t>
+            </a:r>
+            <a:r>
+              <a:rPr sz="1700" b="0">
+                <a:solidFill>
+                  <a:srgbClr val="222222"/>
+                </a:solidFill>
+                <a:latin typeface="맑은 고딕"/>
+              </a:rPr>
+              <a:t> 는 </a:t>
+            </a:r>
+            <a:r>
+              <a:rPr sz="1700" b="1">
+                <a:solidFill>
+                  <a:srgbClr val="222222"/>
+                </a:solidFill>
+                <a:latin typeface="맑은 고딕"/>
+              </a:rPr>
+              <a:t>0</a:t>
             </a:r>
           </a:p>
           <a:p>
@@ -10481,7 +11563,25 @@
                 </a:solidFill>
                 <a:latin typeface="맑은 고딕"/>
               </a:rPr>
-              <a:t>•  거르면 11건 → **2건** (ORA-16037)</a:t>
+              <a:t>•  거르면 11건 → </a:t>
+            </a:r>
+            <a:r>
+              <a:rPr sz="1700" b="1">
+                <a:solidFill>
+                  <a:srgbClr val="222222"/>
+                </a:solidFill>
+                <a:latin typeface="맑은 고딕"/>
+              </a:rPr>
+              <a:t>2건</a:t>
+            </a:r>
+            <a:r>
+              <a:rPr sz="1700" b="0">
+                <a:solidFill>
+                  <a:srgbClr val="222222"/>
+                </a:solidFill>
+                <a:latin typeface="맑은 고딕"/>
+              </a:rPr>
+              <a:t> (ORA-16037)</a:t>
             </a:r>
           </a:p>
         </p:txBody>
@@ -10660,7 +11760,45 @@
                 </a:solidFill>
                 <a:latin typeface="맑은 고딕"/>
               </a:rPr>
-              <a:t>•  `transport lag` / `apply lag` — 7장부터 본 둘</a:t>
+              <a:t>•  </a:t>
+            </a:r>
+            <a:r>
+              <a:rPr sz="1700" b="0">
+                <a:solidFill>
+                  <a:srgbClr val="222222"/>
+                </a:solidFill>
+                <a:latin typeface="Consolas"/>
+                <a:cs typeface="Consolas"/>
+              </a:rPr>
+              <a:t>transport lag</a:t>
+            </a:r>
+            <a:r>
+              <a:rPr sz="1700" b="0">
+                <a:solidFill>
+                  <a:srgbClr val="222222"/>
+                </a:solidFill>
+                <a:latin typeface="맑은 고딕"/>
+              </a:rPr>
+              <a:t> / </a:t>
+            </a:r>
+            <a:r>
+              <a:rPr sz="1700" b="0">
+                <a:solidFill>
+                  <a:srgbClr val="222222"/>
+                </a:solidFill>
+                <a:latin typeface="Consolas"/>
+                <a:cs typeface="Consolas"/>
+              </a:rPr>
+              <a:t>apply lag</a:t>
+            </a:r>
+            <a:r>
+              <a:rPr sz="1700" b="0">
+                <a:solidFill>
+                  <a:srgbClr val="222222"/>
+                </a:solidFill>
+                <a:latin typeface="맑은 고딕"/>
+              </a:rPr>
+              <a:t> — 7장부터 본 둘</a:t>
             </a:r>
           </a:p>
           <a:p>
@@ -10676,7 +11814,26 @@
                 </a:solidFill>
                 <a:latin typeface="맑은 고딕"/>
               </a:rPr>
-              <a:t>•  **`apply finish time`** — 밀린 것을 다 적용할 예상 시간</a:t>
+              <a:t>•  </a:t>
+            </a:r>
+            <a:r>
+              <a:rPr sz="1700" b="1">
+                <a:solidFill>
+                  <a:srgbClr val="222222"/>
+                </a:solidFill>
+                <a:latin typeface="Consolas"/>
+                <a:cs typeface="Consolas"/>
+              </a:rPr>
+              <a:t>apply finish time</a:t>
+            </a:r>
+            <a:r>
+              <a:rPr sz="1700" b="0">
+                <a:solidFill>
+                  <a:srgbClr val="222222"/>
+                </a:solidFill>
+                <a:latin typeface="맑은 고딕"/>
+              </a:rPr>
+              <a:t> — 밀린 것을 다 적용할 예상 시간</a:t>
             </a:r>
           </a:p>
           <a:p>
@@ -10692,7 +11849,35 @@
                 </a:solidFill>
                 <a:latin typeface="맑은 고딕"/>
               </a:rPr>
-              <a:t>•  **`estimated startup time`** — 실측 **11초**</a:t>
+              <a:t>•  </a:t>
+            </a:r>
+            <a:r>
+              <a:rPr sz="1700" b="1">
+                <a:solidFill>
+                  <a:srgbClr val="222222"/>
+                </a:solidFill>
+                <a:latin typeface="Consolas"/>
+                <a:cs typeface="Consolas"/>
+              </a:rPr>
+              <a:t>estimated startup time</a:t>
+            </a:r>
+            <a:r>
+              <a:rPr sz="1700" b="0">
+                <a:solidFill>
+                  <a:srgbClr val="222222"/>
+                </a:solidFill>
+                <a:latin typeface="맑은 고딕"/>
+              </a:rPr>
+              <a:t> — 실측 </a:t>
+            </a:r>
+            <a:r>
+              <a:rPr sz="1700" b="1">
+                <a:solidFill>
+                  <a:srgbClr val="222222"/>
+                </a:solidFill>
+                <a:latin typeface="맑은 고딕"/>
+              </a:rPr>
+              <a:t>11초</a:t>
             </a:r>
           </a:p>
           <a:p>
@@ -10708,7 +11893,16 @@
                 </a:solidFill>
                 <a:latin typeface="맑은 고딕"/>
               </a:rPr>
-              <a:t>•  두 값을 더하면 **RTO 근거**</a:t>
+              <a:t>•  두 값을 더하면 </a:t>
+            </a:r>
+            <a:r>
+              <a:rPr sz="1700" b="1">
+                <a:solidFill>
+                  <a:srgbClr val="222222"/>
+                </a:solidFill>
+                <a:latin typeface="맑은 고딕"/>
+              </a:rPr>
+              <a:t>RTO 근거</a:t>
             </a:r>
           </a:p>
         </p:txBody>
@@ -10903,7 +12097,26 @@
                 </a:solidFill>
                 <a:latin typeface="맑은 고딕"/>
               </a:rPr>
-              <a:t>•  **Primary 에서 조회 → `no rows selected`**</a:t>
+              <a:t>•  </a:t>
+            </a:r>
+            <a:r>
+              <a:rPr sz="1700" b="1">
+                <a:solidFill>
+                  <a:srgbClr val="222222"/>
+                </a:solidFill>
+                <a:latin typeface="맑은 고딕"/>
+              </a:rPr>
+              <a:t>Primary 에서 조회 → </a:t>
+            </a:r>
+            <a:r>
+              <a:rPr sz="1700" b="1">
+                <a:solidFill>
+                  <a:srgbClr val="222222"/>
+                </a:solidFill>
+                <a:latin typeface="Consolas"/>
+                <a:cs typeface="Consolas"/>
+              </a:rPr>
+              <a:t>no rows selected</a:t>
             </a:r>
           </a:p>
           <a:p>
@@ -10919,7 +12132,25 @@
                 </a:solidFill>
                 <a:latin typeface="맑은 고딕"/>
               </a:rPr>
-              <a:t>•  지연은 **받는 쪽**의 개념이므로 당연</a:t>
+              <a:t>•  지연은 </a:t>
+            </a:r>
+            <a:r>
+              <a:rPr sz="1700" b="1">
+                <a:solidFill>
+                  <a:srgbClr val="222222"/>
+                </a:solidFill>
+                <a:latin typeface="맑은 고딕"/>
+              </a:rPr>
+              <a:t>받는 쪽</a:t>
+            </a:r>
+            <a:r>
+              <a:rPr sz="1700" b="0">
+                <a:solidFill>
+                  <a:srgbClr val="222222"/>
+                </a:solidFill>
+                <a:latin typeface="맑은 고딕"/>
+              </a:rPr>
+              <a:t>의 개념이므로 당연</a:t>
             </a:r>
           </a:p>
           <a:p>
@@ -11114,7 +12345,35 @@
                 </a:solidFill>
                 <a:latin typeface="맑은 고딕"/>
               </a:rPr>
-              <a:t>•  `REDO_SOURCE` 가 **들여쓰기를 대신한다**</a:t>
+              <a:t>•  </a:t>
+            </a:r>
+            <a:r>
+              <a:rPr sz="1700" b="0">
+                <a:solidFill>
+                  <a:srgbClr val="222222"/>
+                </a:solidFill>
+                <a:latin typeface="Consolas"/>
+                <a:cs typeface="Consolas"/>
+              </a:rPr>
+              <a:t>REDO_SOURCE</a:t>
+            </a:r>
+            <a:r>
+              <a:rPr sz="1700" b="0">
+                <a:solidFill>
+                  <a:srgbClr val="222222"/>
+                </a:solidFill>
+                <a:latin typeface="맑은 고딕"/>
+              </a:rPr>
+              <a:t> 가 </a:t>
+            </a:r>
+            <a:r>
+              <a:rPr sz="1700" b="1">
+                <a:solidFill>
+                  <a:srgbClr val="222222"/>
+                </a:solidFill>
+                <a:latin typeface="맑은 고딕"/>
+              </a:rPr>
+              <a:t>들여쓰기를 대신한다</a:t>
             </a:r>
           </a:p>
           <a:p>
@@ -11130,7 +12389,36 @@
                 </a:solidFill>
                 <a:latin typeface="맑은 고딕"/>
               </a:rPr>
-              <a:t>•  chicago `-N/A-` / boston `chicago`</a:t>
+              <a:t>•  chicago </a:t>
+            </a:r>
+            <a:r>
+              <a:rPr sz="1700" b="0">
+                <a:solidFill>
+                  <a:srgbClr val="222222"/>
+                </a:solidFill>
+                <a:latin typeface="Consolas"/>
+                <a:cs typeface="Consolas"/>
+              </a:rPr>
+              <a:t>-N/A-</a:t>
+            </a:r>
+            <a:r>
+              <a:rPr sz="1700" b="0">
+                <a:solidFill>
+                  <a:srgbClr val="222222"/>
+                </a:solidFill>
+                <a:latin typeface="맑은 고딕"/>
+              </a:rPr>
+              <a:t> / boston </a:t>
+            </a:r>
+            <a:r>
+              <a:rPr sz="1700" b="0">
+                <a:solidFill>
+                  <a:srgbClr val="222222"/>
+                </a:solidFill>
+                <a:latin typeface="Consolas"/>
+                <a:cs typeface="Consolas"/>
+              </a:rPr>
+              <a:t>chicago</a:t>
             </a:r>
           </a:p>
           <a:p>
@@ -11162,7 +12450,73 @@
                 </a:solidFill>
                 <a:latin typeface="맑은 고딕"/>
               </a:rPr>
-              <a:t>•  `STATUS` 는 문자열이 아니라 **숫자** — `a10` 주면 `##########`</a:t>
+              <a:t>•  </a:t>
+            </a:r>
+            <a:r>
+              <a:rPr sz="1700" b="0">
+                <a:solidFill>
+                  <a:srgbClr val="222222"/>
+                </a:solidFill>
+                <a:latin typeface="Consolas"/>
+                <a:cs typeface="Consolas"/>
+              </a:rPr>
+              <a:t>STATUS</a:t>
+            </a:r>
+            <a:r>
+              <a:rPr sz="1700" b="0">
+                <a:solidFill>
+                  <a:srgbClr val="222222"/>
+                </a:solidFill>
+                <a:latin typeface="맑은 고딕"/>
+              </a:rPr>
+              <a:t> 는 문자열이 아니라 </a:t>
+            </a:r>
+            <a:r>
+              <a:rPr sz="1700" b="1">
+                <a:solidFill>
+                  <a:srgbClr val="222222"/>
+                </a:solidFill>
+                <a:latin typeface="맑은 고딕"/>
+              </a:rPr>
+              <a:t>숫자</a:t>
+            </a:r>
+            <a:r>
+              <a:rPr sz="1700" b="0">
+                <a:solidFill>
+                  <a:srgbClr val="222222"/>
+                </a:solidFill>
+                <a:latin typeface="맑은 고딕"/>
+              </a:rPr>
+              <a:t> — </a:t>
+            </a:r>
+            <a:r>
+              <a:rPr sz="1700" b="0">
+                <a:solidFill>
+                  <a:srgbClr val="222222"/>
+                </a:solidFill>
+                <a:latin typeface="Consolas"/>
+                <a:cs typeface="Consolas"/>
+              </a:rPr>
+              <a:t>a10</a:t>
+            </a:r>
+            <a:r>
+              <a:rPr sz="1700" b="0">
+                <a:solidFill>
+                  <a:srgbClr val="222222"/>
+                </a:solidFill>
+                <a:latin typeface="맑은 고딕"/>
+              </a:rPr>
+              <a:t> 주면 </a:t>
+            </a:r>
+            <a:r>
+              <a:rPr sz="1700" b="0">
+                <a:solidFill>
+                  <a:srgbClr val="222222"/>
+                </a:solidFill>
+                <a:latin typeface="Consolas"/>
+                <a:cs typeface="Consolas"/>
+              </a:rPr>
+              <a:t>##########</a:t>
             </a:r>
           </a:p>
         </p:txBody>
@@ -11341,7 +12695,26 @@
                 </a:solidFill>
                 <a:latin typeface="맑은 고딕"/>
               </a:rPr>
-              <a:t>•  `V$DATAGUARD_STATUS` 상태 메시지</a:t>
+              <a:t>•  </a:t>
+            </a:r>
+            <a:r>
+              <a:rPr sz="1700" b="0">
+                <a:solidFill>
+                  <a:srgbClr val="222222"/>
+                </a:solidFill>
+                <a:latin typeface="Consolas"/>
+                <a:cs typeface="Consolas"/>
+              </a:rPr>
+              <a:t>V$DATAGUARD_STATUS</a:t>
+            </a:r>
+            <a:r>
+              <a:rPr sz="1700" b="0">
+                <a:solidFill>
+                  <a:srgbClr val="222222"/>
+                </a:solidFill>
+                <a:latin typeface="맑은 고딕"/>
+              </a:rPr>
+              <a:t> 상태 메시지</a:t>
             </a:r>
           </a:p>
           <a:p>
@@ -11357,7 +12730,35 @@
                 </a:solidFill>
                 <a:latin typeface="맑은 고딕"/>
               </a:rPr>
-              <a:t>•  `V$DATAGUARD_STATS` 통계 — **한 글자 차이**</a:t>
+              <a:t>•  </a:t>
+            </a:r>
+            <a:r>
+              <a:rPr sz="1700" b="0">
+                <a:solidFill>
+                  <a:srgbClr val="222222"/>
+                </a:solidFill>
+                <a:latin typeface="Consolas"/>
+                <a:cs typeface="Consolas"/>
+              </a:rPr>
+              <a:t>V$DATAGUARD_STATS</a:t>
+            </a:r>
+            <a:r>
+              <a:rPr sz="1700" b="0">
+                <a:solidFill>
+                  <a:srgbClr val="222222"/>
+                </a:solidFill>
+                <a:latin typeface="맑은 고딕"/>
+              </a:rPr>
+              <a:t> 통계 — </a:t>
+            </a:r>
+            <a:r>
+              <a:rPr sz="1700" b="1">
+                <a:solidFill>
+                  <a:srgbClr val="222222"/>
+                </a:solidFill>
+                <a:latin typeface="맑은 고딕"/>
+              </a:rPr>
+              <a:t>한 글자 차이</a:t>
             </a:r>
           </a:p>
           <a:p>
@@ -11373,7 +12774,17 @@
                 </a:solidFill>
                 <a:latin typeface="맑은 고딕"/>
               </a:rPr>
-              <a:t>•  틀리면 `ORA-00942: table or view does not exist`</a:t>
+              <a:t>•  틀리면 </a:t>
+            </a:r>
+            <a:r>
+              <a:rPr sz="1700" b="0">
+                <a:solidFill>
+                  <a:srgbClr val="222222"/>
+                </a:solidFill>
+                <a:latin typeface="Consolas"/>
+                <a:cs typeface="Consolas"/>
+              </a:rPr>
+              <a:t>ORA-00942: table or view does not exist</a:t>
             </a:r>
           </a:p>
           <a:p>
@@ -11389,7 +12800,16 @@
                 </a:solidFill>
                 <a:latin typeface="맑은 고딕"/>
               </a:rPr>
-              <a:t>•  **같은 번호가 권한 부족일 때도 나온다**</a:t>
+              <a:t>•  </a:t>
+            </a:r>
+            <a:r>
+              <a:rPr sz="1700" b="1">
+                <a:solidFill>
+                  <a:srgbClr val="222222"/>
+                </a:solidFill>
+                <a:latin typeface="맑은 고딕"/>
+              </a:rPr>
+              <a:t>같은 번호가 권한 부족일 때도 나온다</a:t>
             </a:r>
           </a:p>
         </p:txBody>
@@ -12059,7 +13479,36 @@
                 </a:solidFill>
                 <a:latin typeface="맑은 고딕"/>
               </a:rPr>
-              <a:t>•  `export configuration to 'ch14_export.xml'` → `Succeeded.`</a:t>
+              <a:t>•  </a:t>
+            </a:r>
+            <a:r>
+              <a:rPr sz="1700" b="0">
+                <a:solidFill>
+                  <a:srgbClr val="222222"/>
+                </a:solidFill>
+                <a:latin typeface="Consolas"/>
+                <a:cs typeface="Consolas"/>
+              </a:rPr>
+              <a:t>export configuration to 'ch14_export.xml'</a:t>
+            </a:r>
+            <a:r>
+              <a:rPr sz="1700" b="0">
+                <a:solidFill>
+                  <a:srgbClr val="222222"/>
+                </a:solidFill>
+                <a:latin typeface="맑은 고딕"/>
+              </a:rPr>
+              <a:t> → </a:t>
+            </a:r>
+            <a:r>
+              <a:rPr sz="1700" b="0">
+                <a:solidFill>
+                  <a:srgbClr val="222222"/>
+                </a:solidFill>
+                <a:latin typeface="Consolas"/>
+                <a:cs typeface="Consolas"/>
+              </a:rPr>
+              <a:t>Succeeded.</a:t>
             </a:r>
           </a:p>
           <a:p>
@@ -12075,7 +13524,16 @@
                 </a:solidFill>
                 <a:latin typeface="맑은 고딕"/>
               </a:rPr>
-              <a:t>•  **어디에 만들었는지 말해 주지 않는다**</a:t>
+              <a:t>•  </a:t>
+            </a:r>
+            <a:r>
+              <a:rPr sz="1700" b="1">
+                <a:solidFill>
+                  <a:srgbClr val="222222"/>
+                </a:solidFill>
+                <a:latin typeface="맑은 고딕"/>
+              </a:rPr>
+              <a:t>어디에 만들었는지 말해 주지 않는다</a:t>
             </a:r>
           </a:p>
           <a:p>
@@ -12091,7 +13549,26 @@
                 </a:solidFill>
                 <a:latin typeface="맑은 고딕"/>
               </a:rPr>
-              <a:t>•  `$ORACLE_HOME/dbs` 에는 없다</a:t>
+              <a:t>•  </a:t>
+            </a:r>
+            <a:r>
+              <a:rPr sz="1700" b="0">
+                <a:solidFill>
+                  <a:srgbClr val="222222"/>
+                </a:solidFill>
+                <a:latin typeface="Consolas"/>
+                <a:cs typeface="Consolas"/>
+              </a:rPr>
+              <a:t>$ORACLE_HOME/dbs</a:t>
+            </a:r>
+            <a:r>
+              <a:rPr sz="1700" b="0">
+                <a:solidFill>
+                  <a:srgbClr val="222222"/>
+                </a:solidFill>
+                <a:latin typeface="맑은 고딕"/>
+              </a:rPr>
+              <a:t> 에는 없다</a:t>
             </a:r>
           </a:p>
           <a:p>
@@ -12107,7 +13584,17 @@
                 </a:solidFill>
                 <a:latin typeface="맑은 고딕"/>
               </a:rPr>
-              <a:t>•  실측 → `/u01/app/oracle/diag/rdbms/chicago/chicago/trace/`</a:t>
+              <a:t>•  실측 → </a:t>
+            </a:r>
+            <a:r>
+              <a:rPr sz="1700" b="0">
+                <a:solidFill>
+                  <a:srgbClr val="222222"/>
+                </a:solidFill>
+                <a:latin typeface="Consolas"/>
+                <a:cs typeface="Consolas"/>
+              </a:rPr>
+              <a:t>/u01/app/oracle/diag/rdbms/chicago/chicago/trace/</a:t>
             </a:r>
           </a:p>
           <a:p>
@@ -12302,7 +13789,17 @@
                 </a:solidFill>
                 <a:latin typeface="맑은 고딕"/>
               </a:rPr>
-              <a:t>•  `export configuration to '/tmp/ch14_abs.xml';`</a:t>
+              <a:t>•  </a:t>
+            </a:r>
+            <a:r>
+              <a:rPr sz="1700" b="0">
+                <a:solidFill>
+                  <a:srgbClr val="222222"/>
+                </a:solidFill>
+                <a:latin typeface="Consolas"/>
+                <a:cs typeface="Consolas"/>
+              </a:rPr>
+              <a:t>export configuration to '/tmp/ch14_abs.xml';</a:t>
             </a:r>
           </a:p>
           <a:p>
@@ -12318,7 +13815,17 @@
                 </a:solidFill>
                 <a:latin typeface="맑은 고딕"/>
               </a:rPr>
-              <a:t>•  → **`ORA-16540: invalid argument`**</a:t>
+              <a:t>•  → </a:t>
+            </a:r>
+            <a:r>
+              <a:rPr sz="1700" b="1">
+                <a:solidFill>
+                  <a:srgbClr val="222222"/>
+                </a:solidFill>
+                <a:latin typeface="Consolas"/>
+                <a:cs typeface="Consolas"/>
+              </a:rPr>
+              <a:t>ORA-16540: invalid argument</a:t>
             </a:r>
           </a:p>
           <a:p>
@@ -12334,7 +13841,17 @@
                 </a:solidFill>
                 <a:latin typeface="맑은 고딕"/>
               </a:rPr>
-              <a:t>•  `ORA-06512: at "SYS.DBMS_DRS", line 1947`</a:t>
+              <a:t>•  </a:t>
+            </a:r>
+            <a:r>
+              <a:rPr sz="1700" b="0">
+                <a:solidFill>
+                  <a:srgbClr val="222222"/>
+                </a:solidFill>
+                <a:latin typeface="Consolas"/>
+                <a:cs typeface="Consolas"/>
+              </a:rPr>
+              <a:t>ORA-06512: at "SYS.DBMS_DRS", line 1947</a:t>
             </a:r>
           </a:p>
           <a:p>
@@ -12350,7 +13867,35 @@
                 </a:solidFill>
                 <a:latin typeface="맑은 고딕"/>
               </a:rPr>
-              <a:t>•  `/` 아래도 같은 오류 — **위치와 무관**</a:t>
+              <a:t>•  </a:t>
+            </a:r>
+            <a:r>
+              <a:rPr sz="1700" b="0">
+                <a:solidFill>
+                  <a:srgbClr val="222222"/>
+                </a:solidFill>
+                <a:latin typeface="Consolas"/>
+                <a:cs typeface="Consolas"/>
+              </a:rPr>
+              <a:t>/</a:t>
+            </a:r>
+            <a:r>
+              <a:rPr sz="1700" b="0">
+                <a:solidFill>
+                  <a:srgbClr val="222222"/>
+                </a:solidFill>
+                <a:latin typeface="맑은 고딕"/>
+              </a:rPr>
+              <a:t> 아래도 같은 오류 — </a:t>
+            </a:r>
+            <a:r>
+              <a:rPr sz="1700" b="1">
+                <a:solidFill>
+                  <a:srgbClr val="222222"/>
+                </a:solidFill>
+                <a:latin typeface="맑은 고딕"/>
+              </a:rPr>
+              <a:t>위치와 무관</a:t>
             </a:r>
           </a:p>
           <a:p>
@@ -12366,7 +13911,16 @@
                 </a:solidFill>
                 <a:latin typeface="맑은 고딕"/>
               </a:rPr>
-              <a:t>•  인자는 경로가 아니라 **파일 이름**</a:t>
+              <a:t>•  인자는 경로가 아니라 </a:t>
+            </a:r>
+            <a:r>
+              <a:rPr sz="1700" b="1">
+                <a:solidFill>
+                  <a:srgbClr val="222222"/>
+                </a:solidFill>
+                <a:latin typeface="맑은 고딕"/>
+              </a:rPr>
+              <a:t>파일 이름</a:t>
             </a:r>
           </a:p>
         </p:txBody>
@@ -12545,7 +14099,17 @@
                 </a:solidFill>
                 <a:latin typeface="맑은 고딕"/>
               </a:rPr>
-              <a:t>•  `import configuration from 'ch14_export.xml';`</a:t>
+              <a:t>•  </a:t>
+            </a:r>
+            <a:r>
+              <a:rPr sz="1700" b="0">
+                <a:solidFill>
+                  <a:srgbClr val="222222"/>
+                </a:solidFill>
+                <a:latin typeface="Consolas"/>
+                <a:cs typeface="Consolas"/>
+              </a:rPr>
+              <a:t>import configuration from 'ch14_export.xml';</a:t>
             </a:r>
           </a:p>
           <a:p>
@@ -12561,7 +14125,17 @@
                 </a:solidFill>
                 <a:latin typeface="맑은 고딕"/>
               </a:rPr>
-              <a:t>•  → **`ORA-16504: configuration already exists`**</a:t>
+              <a:t>•  → </a:t>
+            </a:r>
+            <a:r>
+              <a:rPr sz="1700" b="1">
+                <a:solidFill>
+                  <a:srgbClr val="222222"/>
+                </a:solidFill>
+                <a:latin typeface="Consolas"/>
+                <a:cs typeface="Consolas"/>
+              </a:rPr>
+              <a:t>ORA-16504: configuration already exists</a:t>
             </a:r>
           </a:p>
           <a:p>
@@ -12593,7 +14167,36 @@
                 </a:solidFill>
                 <a:latin typeface="맑은 고딕"/>
               </a:rPr>
-              <a:t>•  복구는 `REMOVE CONFIGURATION` → `IMPORT`</a:t>
+              <a:t>•  복구는 </a:t>
+            </a:r>
+            <a:r>
+              <a:rPr sz="1700" b="0">
+                <a:solidFill>
+                  <a:srgbClr val="222222"/>
+                </a:solidFill>
+                <a:latin typeface="Consolas"/>
+                <a:cs typeface="Consolas"/>
+              </a:rPr>
+              <a:t>REMOVE CONFIGURATION</a:t>
+            </a:r>
+            <a:r>
+              <a:rPr sz="1700" b="0">
+                <a:solidFill>
+                  <a:srgbClr val="222222"/>
+                </a:solidFill>
+                <a:latin typeface="맑은 고딕"/>
+              </a:rPr>
+              <a:t> → </a:t>
+            </a:r>
+            <a:r>
+              <a:rPr sz="1700" b="0">
+                <a:solidFill>
+                  <a:srgbClr val="222222"/>
+                </a:solidFill>
+                <a:latin typeface="Consolas"/>
+                <a:cs typeface="Consolas"/>
+              </a:rPr>
+              <a:t>IMPORT</a:t>
             </a:r>
           </a:p>
           <a:p>
@@ -12609,7 +14212,25 @@
                 </a:solidFill>
                 <a:latin typeface="맑은 고딕"/>
               </a:rPr>
-              <a:t>•  그사이 **감시 공백 구간**이 생긴다</a:t>
+              <a:t>•  그사이 </a:t>
+            </a:r>
+            <a:r>
+              <a:rPr sz="1700" b="1">
+                <a:solidFill>
+                  <a:srgbClr val="222222"/>
+                </a:solidFill>
+                <a:latin typeface="맑은 고딕"/>
+              </a:rPr>
+              <a:t>감시 공백 구간</a:t>
+            </a:r>
+            <a:r>
+              <a:rPr sz="1700" b="0">
+                <a:solidFill>
+                  <a:srgbClr val="222222"/>
+                </a:solidFill>
+                <a:latin typeface="맑은 고딕"/>
+              </a:rPr>
+              <a:t>이 생긴다</a:t>
             </a:r>
           </a:p>
         </p:txBody>
@@ -12788,7 +14409,25 @@
                 </a:solidFill>
                 <a:latin typeface="맑은 고딕"/>
               </a:rPr>
-              <a:t>•  13장 구성 직후 — **8,192** 바이트</a:t>
+              <a:t>•  13장 구성 직후 — </a:t>
+            </a:r>
+            <a:r>
+              <a:rPr sz="1700" b="1">
+                <a:solidFill>
+                  <a:srgbClr val="222222"/>
+                </a:solidFill>
+                <a:latin typeface="맑은 고딕"/>
+              </a:rPr>
+              <a:t>8,192</a:t>
+            </a:r>
+            <a:r>
+              <a:rPr sz="1700" b="0">
+                <a:solidFill>
+                  <a:srgbClr val="222222"/>
+                </a:solidFill>
+                <a:latin typeface="맑은 고딕"/>
+              </a:rPr>
+              <a:t> 바이트</a:t>
             </a:r>
           </a:p>
           <a:p>
@@ -12804,7 +14443,25 @@
                 </a:solidFill>
                 <a:latin typeface="맑은 고딕"/>
               </a:rPr>
-              <a:t>•  14장 속성·FSFO 를 손본 뒤 — **12,288** 바이트</a:t>
+              <a:t>•  14장 속성·FSFO 를 손본 뒤 — </a:t>
+            </a:r>
+            <a:r>
+              <a:rPr sz="1700" b="1">
+                <a:solidFill>
+                  <a:srgbClr val="222222"/>
+                </a:solidFill>
+                <a:latin typeface="맑은 고딕"/>
+              </a:rPr>
+              <a:t>12,288</a:t>
+            </a:r>
+            <a:r>
+              <a:rPr sz="1700" b="0">
+                <a:solidFill>
+                  <a:srgbClr val="222222"/>
+                </a:solidFill>
+                <a:latin typeface="맑은 고딕"/>
+              </a:rPr>
+              <a:t> 바이트</a:t>
             </a:r>
           </a:p>
           <a:p>
@@ -12836,7 +14493,26 @@
                 </a:solidFill>
                 <a:latin typeface="맑은 고딕"/>
               </a:rPr>
-              <a:t>•  XML 을 정기적으로 남기고 `diff` 로 비교</a:t>
+              <a:t>•  XML 을 정기적으로 남기고 </a:t>
+            </a:r>
+            <a:r>
+              <a:rPr sz="1700" b="0">
+                <a:solidFill>
+                  <a:srgbClr val="222222"/>
+                </a:solidFill>
+                <a:latin typeface="Consolas"/>
+                <a:cs typeface="Consolas"/>
+              </a:rPr>
+              <a:t>diff</a:t>
+            </a:r>
+            <a:r>
+              <a:rPr sz="1700" b="0">
+                <a:solidFill>
+                  <a:srgbClr val="222222"/>
+                </a:solidFill>
+                <a:latin typeface="맑은 고딕"/>
+              </a:rPr>
+              <a:t> 로 비교</a:t>
             </a:r>
           </a:p>
         </p:txBody>
@@ -13286,7 +14962,16 @@
                 </a:solidFill>
                 <a:latin typeface="맑은 고딕"/>
               </a:rPr>
-              <a:t>•  판단 주체 = **관측자(Observer)**</a:t>
+              <a:t>•  판단 주체 = </a:t>
+            </a:r>
+            <a:r>
+              <a:rPr sz="1700" b="1">
+                <a:solidFill>
+                  <a:srgbClr val="222222"/>
+                </a:solidFill>
+                <a:latin typeface="맑은 고딕"/>
+              </a:rPr>
+              <a:t>관측자(Observer)</a:t>
             </a:r>
           </a:p>
           <a:p>
@@ -13302,7 +14987,16 @@
                 </a:solidFill>
                 <a:latin typeface="맑은 고딕"/>
               </a:rPr>
-              <a:t>•  Standby 가 스스로 판단하면 **split brain**</a:t>
+              <a:t>•  Standby 가 스스로 판단하면 </a:t>
+            </a:r>
+            <a:r>
+              <a:rPr sz="1700" b="1">
+                <a:solidFill>
+                  <a:srgbClr val="222222"/>
+                </a:solidFill>
+                <a:latin typeface="맑은 고딕"/>
+              </a:rPr>
+              <a:t>split brain</a:t>
             </a:r>
           </a:p>
           <a:p>
@@ -13334,7 +15028,25 @@
                 </a:solidFill>
                 <a:latin typeface="맑은 고딕"/>
               </a:rPr>
-              <a:t>•  Primary·Standby 와 **다른 호스트**에 둔다</a:t>
+              <a:t>•  Primary·Standby 와 </a:t>
+            </a:r>
+            <a:r>
+              <a:rPr sz="1700" b="1">
+                <a:solidFill>
+                  <a:srgbClr val="222222"/>
+                </a:solidFill>
+                <a:latin typeface="맑은 고딕"/>
+              </a:rPr>
+              <a:t>다른 호스트</a:t>
+            </a:r>
+            <a:r>
+              <a:rPr sz="1700" b="0">
+                <a:solidFill>
+                  <a:srgbClr val="222222"/>
+                </a:solidFill>
+                <a:latin typeface="맑은 고딕"/>
+              </a:rPr>
+              <a:t>에 둔다</a:t>
             </a:r>
           </a:p>
         </p:txBody>
@@ -13513,7 +15225,17 @@
                 </a:solidFill>
                 <a:latin typeface="맑은 고딕"/>
               </a:rPr>
-              <a:t>•  `START OBSERVER ... IN BACKGROUND`</a:t>
+              <a:t>•  </a:t>
+            </a:r>
+            <a:r>
+              <a:rPr sz="1700" b="0">
+                <a:solidFill>
+                  <a:srgbClr val="222222"/>
+                </a:solidFill>
+                <a:latin typeface="Consolas"/>
+                <a:cs typeface="Consolas"/>
+              </a:rPr>
+              <a:t>START OBSERVER ... IN BACKGROUND</a:t>
             </a:r>
           </a:p>
           <a:p>
@@ -13529,7 +15251,17 @@
                 </a:solidFill>
                 <a:latin typeface="맑은 고딕"/>
               </a:rPr>
-              <a:t>•  `CONNECT IDENTIFIER IS &lt;connect identifier&gt;`</a:t>
+              <a:t>•  </a:t>
+            </a:r>
+            <a:r>
+              <a:rPr sz="1700" b="0">
+                <a:solidFill>
+                  <a:srgbClr val="222222"/>
+                </a:solidFill>
+                <a:latin typeface="Consolas"/>
+                <a:cs typeface="Consolas"/>
+              </a:rPr>
+              <a:t>CONNECT IDENTIFIER IS &lt;connect identifier&gt;</a:t>
             </a:r>
           </a:p>
           <a:p>
@@ -13545,7 +15277,16 @@
                 </a:solidFill>
                 <a:latin typeface="맑은 고딕"/>
               </a:rPr>
-              <a:t>•  → **tnsnames 로 접속하는 클라이언트**</a:t>
+              <a:t>•  → </a:t>
+            </a:r>
+            <a:r>
+              <a:rPr sz="1700" b="1">
+                <a:solidFill>
+                  <a:srgbClr val="222222"/>
+                </a:solidFill>
+                <a:latin typeface="맑은 고딕"/>
+              </a:rPr>
+              <a:t>tnsnames 로 접속하는 클라이언트</a:t>
             </a:r>
           </a:p>
           <a:p>
@@ -13561,7 +15302,26 @@
                 </a:solidFill>
                 <a:latin typeface="맑은 고딕"/>
               </a:rPr>
-              <a:t>•  `FILE IS &lt;observer file&gt;` — 상태를 파일에 남긴다</a:t>
+              <a:t>•  </a:t>
+            </a:r>
+            <a:r>
+              <a:rPr sz="1700" b="0">
+                <a:solidFill>
+                  <a:srgbClr val="222222"/>
+                </a:solidFill>
+                <a:latin typeface="Consolas"/>
+                <a:cs typeface="Consolas"/>
+              </a:rPr>
+              <a:t>FILE IS &lt;observer file&gt;</a:t>
+            </a:r>
+            <a:r>
+              <a:rPr sz="1700" b="0">
+                <a:solidFill>
+                  <a:srgbClr val="222222"/>
+                </a:solidFill>
+                <a:latin typeface="맑은 고딕"/>
+              </a:rPr>
+              <a:t> — 상태를 파일에 남긴다</a:t>
             </a:r>
           </a:p>
           <a:p>
@@ -13756,7 +15516,26 @@
                 </a:solidFill>
                 <a:latin typeface="맑은 고딕"/>
               </a:rPr>
-              <a:t>•  `Corrupted Controlfile` YES</a:t>
+              <a:t>•  </a:t>
+            </a:r>
+            <a:r>
+              <a:rPr sz="1700" b="0">
+                <a:solidFill>
+                  <a:srgbClr val="222222"/>
+                </a:solidFill>
+                <a:latin typeface="Consolas"/>
+                <a:cs typeface="Consolas"/>
+              </a:rPr>
+              <a:t>Corrupted Controlfile</a:t>
+            </a:r>
+            <a:r>
+              <a:rPr sz="1700" b="0">
+                <a:solidFill>
+                  <a:srgbClr val="222222"/>
+                </a:solidFill>
+                <a:latin typeface="맑은 고딕"/>
+              </a:rPr>
+              <a:t> YES</a:t>
             </a:r>
           </a:p>
           <a:p>
@@ -13772,7 +15551,26 @@
                 </a:solidFill>
                 <a:latin typeface="맑은 고딕"/>
               </a:rPr>
-              <a:t>•  `Corrupted Dictionary` YES</a:t>
+              <a:t>•  </a:t>
+            </a:r>
+            <a:r>
+              <a:rPr sz="1700" b="0">
+                <a:solidFill>
+                  <a:srgbClr val="222222"/>
+                </a:solidFill>
+                <a:latin typeface="Consolas"/>
+                <a:cs typeface="Consolas"/>
+              </a:rPr>
+              <a:t>Corrupted Dictionary</a:t>
+            </a:r>
+            <a:r>
+              <a:rPr sz="1700" b="0">
+                <a:solidFill>
+                  <a:srgbClr val="222222"/>
+                </a:solidFill>
+                <a:latin typeface="맑은 고딕"/>
+              </a:rPr>
+              <a:t> YES</a:t>
             </a:r>
           </a:p>
           <a:p>
@@ -13788,7 +15586,35 @@
                 </a:solidFill>
                 <a:latin typeface="맑은 고딕"/>
               </a:rPr>
-              <a:t>•  `Inaccessible Logfile` **NO**</a:t>
+              <a:t>•  </a:t>
+            </a:r>
+            <a:r>
+              <a:rPr sz="1700" b="0">
+                <a:solidFill>
+                  <a:srgbClr val="222222"/>
+                </a:solidFill>
+                <a:latin typeface="Consolas"/>
+                <a:cs typeface="Consolas"/>
+              </a:rPr>
+              <a:t>Inaccessible Logfile</a:t>
+            </a:r>
+            <a:r>
+              <a:rPr sz="1700" b="0">
+                <a:solidFill>
+                  <a:srgbClr val="222222"/>
+                </a:solidFill>
+                <a:latin typeface="맑은 고딕"/>
+              </a:rPr>
+              <a:t> </a:t>
+            </a:r>
+            <a:r>
+              <a:rPr sz="1700" b="1">
+                <a:solidFill>
+                  <a:srgbClr val="222222"/>
+                </a:solidFill>
+                <a:latin typeface="맑은 고딕"/>
+              </a:rPr>
+              <a:t>NO</a:t>
             </a:r>
           </a:p>
           <a:p>
@@ -13804,7 +15630,35 @@
                 </a:solidFill>
                 <a:latin typeface="맑은 고딕"/>
               </a:rPr>
-              <a:t>•  `Stuck Archiver` **NO**</a:t>
+              <a:t>•  </a:t>
+            </a:r>
+            <a:r>
+              <a:rPr sz="1700" b="0">
+                <a:solidFill>
+                  <a:srgbClr val="222222"/>
+                </a:solidFill>
+                <a:latin typeface="Consolas"/>
+                <a:cs typeface="Consolas"/>
+              </a:rPr>
+              <a:t>Stuck Archiver</a:t>
+            </a:r>
+            <a:r>
+              <a:rPr sz="1700" b="0">
+                <a:solidFill>
+                  <a:srgbClr val="222222"/>
+                </a:solidFill>
+                <a:latin typeface="맑은 고딕"/>
+              </a:rPr>
+              <a:t> </a:t>
+            </a:r>
+            <a:r>
+              <a:rPr sz="1700" b="1">
+                <a:solidFill>
+                  <a:srgbClr val="222222"/>
+                </a:solidFill>
+                <a:latin typeface="맑은 고딕"/>
+              </a:rPr>
+              <a:t>NO</a:t>
             </a:r>
           </a:p>
           <a:p>
@@ -13820,7 +15674,26 @@
                 </a:solidFill>
                 <a:latin typeface="맑은 고딕"/>
               </a:rPr>
-              <a:t>•  `Datafile Write Errors` YES</a:t>
+              <a:t>•  </a:t>
+            </a:r>
+            <a:r>
+              <a:rPr sz="1700" b="0">
+                <a:solidFill>
+                  <a:srgbClr val="222222"/>
+                </a:solidFill>
+                <a:latin typeface="Consolas"/>
+                <a:cs typeface="Consolas"/>
+              </a:rPr>
+              <a:t>Datafile Write Errors</a:t>
+            </a:r>
+            <a:r>
+              <a:rPr sz="1700" b="0">
+                <a:solidFill>
+                  <a:srgbClr val="222222"/>
+                </a:solidFill>
+                <a:latin typeface="맑은 고딕"/>
+              </a:rPr>
+              <a:t> YES</a:t>
             </a:r>
           </a:p>
         </p:txBody>
@@ -13999,7 +15872,17 @@
                 </a:solidFill>
                 <a:latin typeface="맑은 고딕"/>
               </a:rPr>
-              <a:t>•  `enable fast_start failover`</a:t>
+              <a:t>•  </a:t>
+            </a:r>
+            <a:r>
+              <a:rPr sz="1700" b="0">
+                <a:solidFill>
+                  <a:srgbClr val="222222"/>
+                </a:solidFill>
+                <a:latin typeface="Consolas"/>
+                <a:cs typeface="Consolas"/>
+              </a:rPr>
+              <a:t>enable fast_start failover</a:t>
             </a:r>
           </a:p>
           <a:p>
@@ -14015,7 +15898,17 @@
                 </a:solidFill>
                 <a:latin typeface="맑은 고딕"/>
               </a:rPr>
-              <a:t>•  → **`Warning: ORA-16827: Flashback Database is disabled`**</a:t>
+              <a:t>•  → </a:t>
+            </a:r>
+            <a:r>
+              <a:rPr sz="1700" b="1">
+                <a:solidFill>
+                  <a:srgbClr val="222222"/>
+                </a:solidFill>
+                <a:latin typeface="Consolas"/>
+                <a:cs typeface="Consolas"/>
+              </a:rPr>
+              <a:t>Warning: ORA-16827: Flashback Database is disabled</a:t>
             </a:r>
           </a:p>
           <a:p>
@@ -14031,7 +15924,16 @@
                 </a:solidFill>
                 <a:latin typeface="맑은 고딕"/>
               </a:rPr>
-              <a:t>•  **Error 가 아니라 Warning. 그리고 켜졌다**</a:t>
+              <a:t>•  </a:t>
+            </a:r>
+            <a:r>
+              <a:rPr sz="1700" b="1">
+                <a:solidFill>
+                  <a:srgbClr val="222222"/>
+                </a:solidFill>
+                <a:latin typeface="맑은 고딕"/>
+              </a:rPr>
+              <a:t>Error 가 아니라 Warning. 그리고 켜졌다</a:t>
             </a:r>
           </a:p>
           <a:p>
@@ -14047,7 +15949,25 @@
                 </a:solidFill>
                 <a:latin typeface="맑은 고딕"/>
               </a:rPr>
-              <a:t>•  13장 보호 모드 변경은 ORA-16627 로 **거부**했다</a:t>
+              <a:t>•  13장 보호 모드 변경은 ORA-16627 로 </a:t>
+            </a:r>
+            <a:r>
+              <a:rPr sz="1700" b="1">
+                <a:solidFill>
+                  <a:srgbClr val="222222"/>
+                </a:solidFill>
+                <a:latin typeface="맑은 고딕"/>
+              </a:rPr>
+              <a:t>거부</a:t>
+            </a:r>
+            <a:r>
+              <a:rPr sz="1700" b="0">
+                <a:solidFill>
+                  <a:srgbClr val="222222"/>
+                </a:solidFill>
+                <a:latin typeface="맑은 고딕"/>
+              </a:rPr>
+              <a:t>했다</a:t>
             </a:r>
           </a:p>
           <a:p>
@@ -14063,7 +15983,16 @@
                 </a:solidFill>
                 <a:latin typeface="맑은 고딕"/>
               </a:rPr>
-              <a:t>•  **검사 강도가 명령마다 다르다**</a:t>
+              <a:t>•  </a:t>
+            </a:r>
+            <a:r>
+              <a:rPr sz="1700" b="1">
+                <a:solidFill>
+                  <a:srgbClr val="222222"/>
+                </a:solidFill>
+                <a:latin typeface="맑은 고딕"/>
+              </a:rPr>
+              <a:t>검사 강도가 명령마다 다르다</a:t>
             </a:r>
           </a:p>
         </p:txBody>
@@ -14242,7 +16171,17 @@
                 </a:solidFill>
                 <a:latin typeface="맑은 고딕"/>
               </a:rPr>
-              <a:t>•  `boston  - (*) Physical standby database`</a:t>
+              <a:t>•  </a:t>
+            </a:r>
+            <a:r>
+              <a:rPr sz="1700" b="0">
+                <a:solidFill>
+                  <a:srgbClr val="222222"/>
+                </a:solidFill>
+                <a:latin typeface="Consolas"/>
+                <a:cs typeface="Consolas"/>
+              </a:rPr>
+              <a:t>boston  - (*) Physical standby database</a:t>
             </a:r>
           </a:p>
           <a:p>
@@ -14258,7 +16197,26 @@
                 </a:solidFill>
                 <a:latin typeface="맑은 고딕"/>
               </a:rPr>
-              <a:t>•  `(*) Fast-Start Failover target` — 범례까지 붙는다</a:t>
+              <a:t>•  </a:t>
+            </a:r>
+            <a:r>
+              <a:rPr sz="1700" b="0">
+                <a:solidFill>
+                  <a:srgbClr val="222222"/>
+                </a:solidFill>
+                <a:latin typeface="Consolas"/>
+                <a:cs typeface="Consolas"/>
+              </a:rPr>
+              <a:t>(*) Fast-Start Failover target</a:t>
+            </a:r>
+            <a:r>
+              <a:rPr sz="1700" b="0">
+                <a:solidFill>
+                  <a:srgbClr val="222222"/>
+                </a:solidFill>
+                <a:latin typeface="맑은 고딕"/>
+              </a:rPr>
+              <a:t> — 범례까지 붙는다</a:t>
             </a:r>
           </a:p>
           <a:p>
@@ -14274,7 +16232,17 @@
                 </a:solidFill>
                 <a:latin typeface="맑은 고딕"/>
               </a:rPr>
-              <a:t>•  `Warning: ORA-16819: observer not started`</a:t>
+              <a:t>•  </a:t>
+            </a:r>
+            <a:r>
+              <a:rPr sz="1700" b="0">
+                <a:solidFill>
+                  <a:srgbClr val="222222"/>
+                </a:solidFill>
+                <a:latin typeface="Consolas"/>
+                <a:cs typeface="Consolas"/>
+              </a:rPr>
+              <a:t>Warning: ORA-16819: observer not started</a:t>
             </a:r>
           </a:p>
           <a:p>
@@ -14290,7 +16258,17 @@
                 </a:solidFill>
                 <a:latin typeface="맑은 고딕"/>
               </a:rPr>
-              <a:t>•  `Enabled in Potential Data Loss Mode`</a:t>
+              <a:t>•  </a:t>
+            </a:r>
+            <a:r>
+              <a:rPr sz="1700" b="0">
+                <a:solidFill>
+                  <a:srgbClr val="222222"/>
+                </a:solidFill>
+                <a:latin typeface="Consolas"/>
+                <a:cs typeface="Consolas"/>
+              </a:rPr>
+              <a:t>Enabled in Potential Data Loss Mode</a:t>
             </a:r>
           </a:p>
           <a:p>
@@ -14306,7 +16284,16 @@
                 </a:solidFill>
                 <a:latin typeface="맑은 고딕"/>
               </a:rPr>
-              <a:t>•  Configuration Status: **WARNING**</a:t>
+              <a:t>•  Configuration Status: </a:t>
+            </a:r>
+            <a:r>
+              <a:rPr sz="1700" b="1">
+                <a:solidFill>
+                  <a:srgbClr val="222222"/>
+                </a:solidFill>
+                <a:latin typeface="맑은 고딕"/>
+              </a:rPr>
+              <a:t>WARNING</a:t>
             </a:r>
           </a:p>
         </p:txBody>
@@ -14740,7 +16727,26 @@
                 </a:solidFill>
                 <a:latin typeface="맑은 고딕"/>
               </a:rPr>
-              <a:t>•  `set property 'FastStartFailoverTarget'=''` 양쪽</a:t>
+              <a:t>•  </a:t>
+            </a:r>
+            <a:r>
+              <a:rPr sz="1700" b="0">
+                <a:solidFill>
+                  <a:srgbClr val="222222"/>
+                </a:solidFill>
+                <a:latin typeface="Consolas"/>
+                <a:cs typeface="Consolas"/>
+              </a:rPr>
+              <a:t>set property 'FastStartFailoverTarget'=''</a:t>
+            </a:r>
+            <a:r>
+              <a:rPr sz="1700" b="0">
+                <a:solidFill>
+                  <a:srgbClr val="222222"/>
+                </a:solidFill>
+                <a:latin typeface="맑은 고딕"/>
+              </a:rPr>
+              <a:t> 양쪽</a:t>
             </a:r>
           </a:p>
           <a:p>
@@ -14756,7 +16762,35 @@
                 </a:solidFill>
                 <a:latin typeface="맑은 고딕"/>
               </a:rPr>
-              <a:t>•  `Fast-Start Failover:` **여전히 Enabled**</a:t>
+              <a:t>•  </a:t>
+            </a:r>
+            <a:r>
+              <a:rPr sz="1700" b="0">
+                <a:solidFill>
+                  <a:srgbClr val="222222"/>
+                </a:solidFill>
+                <a:latin typeface="Consolas"/>
+                <a:cs typeface="Consolas"/>
+              </a:rPr>
+              <a:t>Fast-Start Failover:</a:t>
+            </a:r>
+            <a:r>
+              <a:rPr sz="1700" b="0">
+                <a:solidFill>
+                  <a:srgbClr val="222222"/>
+                </a:solidFill>
+                <a:latin typeface="맑은 고딕"/>
+              </a:rPr>
+              <a:t> </a:t>
+            </a:r>
+            <a:r>
+              <a:rPr sz="1700" b="1">
+                <a:solidFill>
+                  <a:srgbClr val="222222"/>
+                </a:solidFill>
+                <a:latin typeface="맑은 고딕"/>
+              </a:rPr>
+              <a:t>여전히 Enabled</a:t>
             </a:r>
           </a:p>
           <a:p>
@@ -14772,7 +16806,36 @@
                 </a:solidFill>
                 <a:latin typeface="맑은 고딕"/>
               </a:rPr>
-              <a:t>•  `Potential Targets: (none)` 인데 `Active Target: boston`</a:t>
+              <a:t>•  </a:t>
+            </a:r>
+            <a:r>
+              <a:rPr sz="1700" b="0">
+                <a:solidFill>
+                  <a:srgbClr val="222222"/>
+                </a:solidFill>
+                <a:latin typeface="Consolas"/>
+                <a:cs typeface="Consolas"/>
+              </a:rPr>
+              <a:t>Potential Targets: (none)</a:t>
+            </a:r>
+            <a:r>
+              <a:rPr sz="1700" b="0">
+                <a:solidFill>
+                  <a:srgbClr val="222222"/>
+                </a:solidFill>
+                <a:latin typeface="맑은 고딕"/>
+              </a:rPr>
+              <a:t> 인데 </a:t>
+            </a:r>
+            <a:r>
+              <a:rPr sz="1700" b="0">
+                <a:solidFill>
+                  <a:srgbClr val="222222"/>
+                </a:solidFill>
+                <a:latin typeface="Consolas"/>
+                <a:cs typeface="Consolas"/>
+              </a:rPr>
+              <a:t>Active Target: boston</a:t>
             </a:r>
           </a:p>
           <a:p>
@@ -14788,7 +16851,16 @@
                 </a:solidFill>
                 <a:latin typeface="맑은 고딕"/>
               </a:rPr>
-              <a:t>•  기능은 켜져 있고 설정만 반쯤 지워진 **중간 상태**</a:t>
+              <a:t>•  기능은 켜져 있고 설정만 반쯤 지워진 </a:t>
+            </a:r>
+            <a:r>
+              <a:rPr sz="1700" b="1">
+                <a:solidFill>
+                  <a:srgbClr val="222222"/>
+                </a:solidFill>
+                <a:latin typeface="맑은 고딕"/>
+              </a:rPr>
+              <a:t>중간 상태</a:t>
             </a:r>
           </a:p>
           <a:p>
@@ -14983,7 +17055,17 @@
                 </a:solidFill>
                 <a:latin typeface="맑은 고딕"/>
               </a:rPr>
-              <a:t>•  `disable fast_start failover`</a:t>
+              <a:t>•  </a:t>
+            </a:r>
+            <a:r>
+              <a:rPr sz="1700" b="0">
+                <a:solidFill>
+                  <a:srgbClr val="222222"/>
+                </a:solidFill>
+                <a:latin typeface="Consolas"/>
+                <a:cs typeface="Consolas"/>
+              </a:rPr>
+              <a:t>disable fast_start failover</a:t>
             </a:r>
           </a:p>
           <a:p>
@@ -14999,7 +17081,36 @@
                 </a:solidFill>
                 <a:latin typeface="맑은 고딕"/>
               </a:rPr>
-              <a:t>•  → `Fast-Start Failover: Disabled`, `Active Target: (none)`</a:t>
+              <a:t>•  → </a:t>
+            </a:r>
+            <a:r>
+              <a:rPr sz="1700" b="0">
+                <a:solidFill>
+                  <a:srgbClr val="222222"/>
+                </a:solidFill>
+                <a:latin typeface="Consolas"/>
+                <a:cs typeface="Consolas"/>
+              </a:rPr>
+              <a:t>Fast-Start Failover: Disabled</a:t>
+            </a:r>
+            <a:r>
+              <a:rPr sz="1700" b="0">
+                <a:solidFill>
+                  <a:srgbClr val="222222"/>
+                </a:solidFill>
+                <a:latin typeface="맑은 고딕"/>
+              </a:rPr>
+              <a:t>, </a:t>
+            </a:r>
+            <a:r>
+              <a:rPr sz="1700" b="0">
+                <a:solidFill>
+                  <a:srgbClr val="222222"/>
+                </a:solidFill>
+                <a:latin typeface="Consolas"/>
+                <a:cs typeface="Consolas"/>
+              </a:rPr>
+              <a:t>Active Target: (none)</a:t>
             </a:r>
           </a:p>
           <a:p>
@@ -15047,7 +17158,26 @@
                 </a:solidFill>
                 <a:latin typeface="맑은 고딕"/>
               </a:rPr>
-              <a:t>•  `OBSERVE ONLY` 로 먼저 관찰한 뒤 켜는 것이 안전</a:t>
+              <a:t>•  </a:t>
+            </a:r>
+            <a:r>
+              <a:rPr sz="1700" b="0">
+                <a:solidFill>
+                  <a:srgbClr val="222222"/>
+                </a:solidFill>
+                <a:latin typeface="Consolas"/>
+                <a:cs typeface="Consolas"/>
+              </a:rPr>
+              <a:t>OBSERVE ONLY</a:t>
+            </a:r>
+            <a:r>
+              <a:rPr sz="1700" b="0">
+                <a:solidFill>
+                  <a:srgbClr val="222222"/>
+                </a:solidFill>
+                <a:latin typeface="맑은 고딕"/>
+              </a:rPr>
+              <a:t> 로 먼저 관찰한 뒤 켜는 것이 안전</a:t>
             </a:r>
           </a:p>
         </p:txBody>
@@ -15226,7 +17356,26 @@
                 </a:solidFill>
                 <a:latin typeface="맑은 고딕"/>
               </a:rPr>
-              <a:t>•  `DISABLE` 직후에도 ORA-16819 가 남아 있었다</a:t>
+              <a:t>•  </a:t>
+            </a:r>
+            <a:r>
+              <a:rPr sz="1700" b="0">
+                <a:solidFill>
+                  <a:srgbClr val="222222"/>
+                </a:solidFill>
+                <a:latin typeface="Consolas"/>
+                <a:cs typeface="Consolas"/>
+              </a:rPr>
+              <a:t>DISABLE</a:t>
+            </a:r>
+            <a:r>
+              <a:rPr sz="1700" b="0">
+                <a:solidFill>
+                  <a:srgbClr val="222222"/>
+                </a:solidFill>
+                <a:latin typeface="맑은 고딕"/>
+              </a:rPr>
+              <a:t> 직후에도 ORA-16819 가 남아 있었다</a:t>
             </a:r>
           </a:p>
           <a:p>
@@ -15242,7 +17391,17 @@
                 </a:solidFill>
                 <a:latin typeface="맑은 고딕"/>
               </a:rPr>
-              <a:t>•  잠시 후 다시 조회 → `SUCCESS`</a:t>
+              <a:t>•  잠시 후 다시 조회 → </a:t>
+            </a:r>
+            <a:r>
+              <a:rPr sz="1700" b="0">
+                <a:solidFill>
+                  <a:srgbClr val="222222"/>
+                </a:solidFill>
+                <a:latin typeface="Consolas"/>
+                <a:cs typeface="Consolas"/>
+              </a:rPr>
+              <a:t>SUCCESS</a:t>
             </a:r>
           </a:p>
           <a:p>
@@ -15258,7 +17417,35 @@
                 </a:solidFill>
                 <a:latin typeface="맑은 고딕"/>
               </a:rPr>
-              <a:t>•  `status updated NN seconds ago` 의 **초를 함께 읽는다**</a:t>
+              <a:t>•  </a:t>
+            </a:r>
+            <a:r>
+              <a:rPr sz="1700" b="0">
+                <a:solidFill>
+                  <a:srgbClr val="222222"/>
+                </a:solidFill>
+                <a:latin typeface="Consolas"/>
+                <a:cs typeface="Consolas"/>
+              </a:rPr>
+              <a:t>status updated NN seconds ago</a:t>
+            </a:r>
+            <a:r>
+              <a:rPr sz="1700" b="0">
+                <a:solidFill>
+                  <a:srgbClr val="222222"/>
+                </a:solidFill>
+                <a:latin typeface="맑은 고딕"/>
+              </a:rPr>
+              <a:t> 의 </a:t>
+            </a:r>
+            <a:r>
+              <a:rPr sz="1700" b="1">
+                <a:solidFill>
+                  <a:srgbClr val="222222"/>
+                </a:solidFill>
+                <a:latin typeface="맑은 고딕"/>
+              </a:rPr>
+              <a:t>초를 함께 읽는다</a:t>
             </a:r>
           </a:p>
           <a:p>
@@ -15692,7 +17879,26 @@
                 </a:solidFill>
                 <a:latin typeface="맑은 고딕"/>
               </a:rPr>
-              <a:t>•  1층 `SHOW CONFIGURATION` — 분 단위. 설정과 다른 상태</a:t>
+              <a:t>•  1층 </a:t>
+            </a:r>
+            <a:r>
+              <a:rPr sz="1700" b="0">
+                <a:solidFill>
+                  <a:srgbClr val="222222"/>
+                </a:solidFill>
+                <a:latin typeface="Consolas"/>
+                <a:cs typeface="Consolas"/>
+              </a:rPr>
+              <a:t>SHOW CONFIGURATION</a:t>
+            </a:r>
+            <a:r>
+              <a:rPr sz="1700" b="0">
+                <a:solidFill>
+                  <a:srgbClr val="222222"/>
+                </a:solidFill>
+                <a:latin typeface="맑은 고딕"/>
+              </a:rPr>
+              <a:t> — 분 단위. 설정과 다른 상태</a:t>
             </a:r>
           </a:p>
           <a:p>
@@ -15708,7 +17914,26 @@
                 </a:solidFill>
                 <a:latin typeface="맑은 고딕"/>
               </a:rPr>
-              <a:t>•  2층 `V$DATAGUARD_STATS` — 분 단위. 지연 추세</a:t>
+              <a:t>•  2층 </a:t>
+            </a:r>
+            <a:r>
+              <a:rPr sz="1700" b="0">
+                <a:solidFill>
+                  <a:srgbClr val="222222"/>
+                </a:solidFill>
+                <a:latin typeface="Consolas"/>
+                <a:cs typeface="Consolas"/>
+              </a:rPr>
+              <a:t>V$DATAGUARD_STATS</a:t>
+            </a:r>
+            <a:r>
+              <a:rPr sz="1700" b="0">
+                <a:solidFill>
+                  <a:srgbClr val="222222"/>
+                </a:solidFill>
+                <a:latin typeface="맑은 고딕"/>
+              </a:rPr>
+              <a:t> — 분 단위. 지연 추세</a:t>
             </a:r>
           </a:p>
           <a:p>
@@ -15724,7 +17949,26 @@
                 </a:solidFill>
                 <a:latin typeface="맑은 고딕"/>
               </a:rPr>
-              <a:t>•  3층 `V$DATAGUARD_STATUS` — 필요시. 사건의 흐름</a:t>
+              <a:t>•  3층 </a:t>
+            </a:r>
+            <a:r>
+              <a:rPr sz="1700" b="0">
+                <a:solidFill>
+                  <a:srgbClr val="222222"/>
+                </a:solidFill>
+                <a:latin typeface="Consolas"/>
+                <a:cs typeface="Consolas"/>
+              </a:rPr>
+              <a:t>V$DATAGUARD_STATUS</a:t>
+            </a:r>
+            <a:r>
+              <a:rPr sz="1700" b="0">
+                <a:solidFill>
+                  <a:srgbClr val="222222"/>
+                </a:solidFill>
+                <a:latin typeface="맑은 고딕"/>
+              </a:rPr>
+              <a:t> — 필요시. 사건의 흐름</a:t>
             </a:r>
           </a:p>
           <a:p>
@@ -15740,7 +17984,35 @@
                 </a:solidFill>
                 <a:latin typeface="맑은 고딕"/>
               </a:rPr>
-              <a:t>•  4층 `VALIDATE DATABASE` — 일·주 단위. **전환 가능 여부**</a:t>
+              <a:t>•  4층 </a:t>
+            </a:r>
+            <a:r>
+              <a:rPr sz="1700" b="0">
+                <a:solidFill>
+                  <a:srgbClr val="222222"/>
+                </a:solidFill>
+                <a:latin typeface="Consolas"/>
+                <a:cs typeface="Consolas"/>
+              </a:rPr>
+              <a:t>VALIDATE DATABASE</a:t>
+            </a:r>
+            <a:r>
+              <a:rPr sz="1700" b="0">
+                <a:solidFill>
+                  <a:srgbClr val="222222"/>
+                </a:solidFill>
+                <a:latin typeface="맑은 고딕"/>
+              </a:rPr>
+              <a:t> — 일·주 단위. </a:t>
+            </a:r>
+            <a:r>
+              <a:rPr sz="1700" b="1">
+                <a:solidFill>
+                  <a:srgbClr val="222222"/>
+                </a:solidFill>
+                <a:latin typeface="맑은 고딕"/>
+              </a:rPr>
+              <a:t>전환 가능 여부</a:t>
             </a:r>
           </a:p>
           <a:p>
@@ -15756,7 +18028,16 @@
                 </a:solidFill>
                 <a:latin typeface="맑은 고딕"/>
               </a:rPr>
-              <a:t>•  5층 알림 로그 — 문제 발생 시. **근본 원인**</a:t>
+              <a:t>•  5층 알림 로그 — 문제 발생 시. </a:t>
+            </a:r>
+            <a:r>
+              <a:rPr sz="1700" b="1">
+                <a:solidFill>
+                  <a:srgbClr val="222222"/>
+                </a:solidFill>
+                <a:latin typeface="맑은 고딕"/>
+              </a:rPr>
+              <a:t>근본 원인</a:t>
             </a:r>
           </a:p>
         </p:txBody>
@@ -15967,7 +18248,26 @@
                 </a:solidFill>
                 <a:latin typeface="맑은 고딕"/>
               </a:rPr>
-              <a:t>•  평소에는 늘 `Yes` 라 넣을 필요를 못 느낀다</a:t>
+              <a:t>•  평소에는 늘 </a:t>
+            </a:r>
+            <a:r>
+              <a:rPr sz="1700" b="0">
+                <a:solidFill>
+                  <a:srgbClr val="222222"/>
+                </a:solidFill>
+                <a:latin typeface="Consolas"/>
+                <a:cs typeface="Consolas"/>
+              </a:rPr>
+              <a:t>Yes</a:t>
+            </a:r>
+            <a:r>
+              <a:rPr sz="1700" b="0">
+                <a:solidFill>
+                  <a:srgbClr val="222222"/>
+                </a:solidFill>
+                <a:latin typeface="맑은 고딕"/>
+              </a:rPr>
+              <a:t> 라 넣을 필요를 못 느낀다</a:t>
             </a:r>
           </a:p>
           <a:p>
@@ -15983,7 +18283,16 @@
                 </a:solidFill>
                 <a:latin typeface="맑은 고딕"/>
               </a:rPr>
-              <a:t>•  그래서 **장애가 나서 전환하려 할 때 처음 안다**</a:t>
+              <a:t>•  그래서 </a:t>
+            </a:r>
+            <a:r>
+              <a:rPr sz="1700" b="1">
+                <a:solidFill>
+                  <a:srgbClr val="222222"/>
+                </a:solidFill>
+                <a:latin typeface="맑은 고딕"/>
+              </a:rPr>
+              <a:t>장애가 나서 전환하려 할 때 처음 안다</a:t>
             </a:r>
           </a:p>
         </p:txBody>
@@ -16162,7 +18471,35 @@
                 </a:solidFill>
                 <a:latin typeface="맑은 고딕"/>
               </a:rPr>
-              <a:t>•  `LogShipping=OFF` 인데 SUCCESS → **설정한 대로**</a:t>
+              <a:t>•  </a:t>
+            </a:r>
+            <a:r>
+              <a:rPr sz="1700" b="0">
+                <a:solidFill>
+                  <a:srgbClr val="222222"/>
+                </a:solidFill>
+                <a:latin typeface="Consolas"/>
+                <a:cs typeface="Consolas"/>
+              </a:rPr>
+              <a:t>LogShipping=OFF</a:t>
+            </a:r>
+            <a:r>
+              <a:rPr sz="1700" b="0">
+                <a:solidFill>
+                  <a:srgbClr val="222222"/>
+                </a:solidFill>
+                <a:latin typeface="맑은 고딕"/>
+              </a:rPr>
+              <a:t> 인데 SUCCESS → </a:t>
+            </a:r>
+            <a:r>
+              <a:rPr sz="1700" b="1">
+                <a:solidFill>
+                  <a:srgbClr val="222222"/>
+                </a:solidFill>
+                <a:latin typeface="맑은 고딕"/>
+              </a:rPr>
+              <a:t>설정한 대로</a:t>
             </a:r>
           </a:p>
           <a:p>
@@ -16178,7 +18515,54 @@
                 </a:solidFill>
                 <a:latin typeface="맑은 고딕"/>
               </a:rPr>
-              <a:t>•  `VALIDATE` 가 `Ready for Switchover: No` → **조치 필요**</a:t>
+              <a:t>•  </a:t>
+            </a:r>
+            <a:r>
+              <a:rPr sz="1700" b="0">
+                <a:solidFill>
+                  <a:srgbClr val="222222"/>
+                </a:solidFill>
+                <a:latin typeface="Consolas"/>
+                <a:cs typeface="Consolas"/>
+              </a:rPr>
+              <a:t>VALIDATE</a:t>
+            </a:r>
+            <a:r>
+              <a:rPr sz="1700" b="0">
+                <a:solidFill>
+                  <a:srgbClr val="222222"/>
+                </a:solidFill>
+                <a:latin typeface="맑은 고딕"/>
+              </a:rPr>
+              <a:t> 가 </a:t>
+            </a:r>
+            <a:r>
+              <a:rPr sz="1700" b="0">
+                <a:solidFill>
+                  <a:srgbClr val="222222"/>
+                </a:solidFill>
+                <a:latin typeface="Consolas"/>
+                <a:cs typeface="Consolas"/>
+              </a:rPr>
+              <a:t>Ready for Switchover: No</a:t>
+            </a:r>
+            <a:r>
+              <a:rPr sz="1700" b="0">
+                <a:solidFill>
+                  <a:srgbClr val="222222"/>
+                </a:solidFill>
+                <a:latin typeface="맑은 고딕"/>
+              </a:rPr>
+              <a:t> → </a:t>
+            </a:r>
+            <a:r>
+              <a:rPr sz="1700" b="1">
+                <a:solidFill>
+                  <a:srgbClr val="222222"/>
+                </a:solidFill>
+                <a:latin typeface="맑은 고딕"/>
+              </a:rPr>
+              <a:t>조치 필요</a:t>
             </a:r>
           </a:p>
           <a:p>
@@ -16194,7 +18578,45 @@
                 </a:solidFill>
                 <a:latin typeface="맑은 고딕"/>
               </a:rPr>
-              <a:t>•  `Warning` 인데 `ERROR_CODE` 0 → 정상</a:t>
+              <a:t>•  </a:t>
+            </a:r>
+            <a:r>
+              <a:rPr sz="1700" b="0">
+                <a:solidFill>
+                  <a:srgbClr val="222222"/>
+                </a:solidFill>
+                <a:latin typeface="Consolas"/>
+                <a:cs typeface="Consolas"/>
+              </a:rPr>
+              <a:t>Warning</a:t>
+            </a:r>
+            <a:r>
+              <a:rPr sz="1700" b="0">
+                <a:solidFill>
+                  <a:srgbClr val="222222"/>
+                </a:solidFill>
+                <a:latin typeface="맑은 고딕"/>
+              </a:rPr>
+              <a:t> 인데 </a:t>
+            </a:r>
+            <a:r>
+              <a:rPr sz="1700" b="0">
+                <a:solidFill>
+                  <a:srgbClr val="222222"/>
+                </a:solidFill>
+                <a:latin typeface="Consolas"/>
+                <a:cs typeface="Consolas"/>
+              </a:rPr>
+              <a:t>ERROR_CODE</a:t>
+            </a:r>
+            <a:r>
+              <a:rPr sz="1700" b="0">
+                <a:solidFill>
+                  <a:srgbClr val="222222"/>
+                </a:solidFill>
+                <a:latin typeface="맑은 고딕"/>
+              </a:rPr>
+              <a:t> 0 → 정상</a:t>
             </a:r>
           </a:p>
           <a:p>
@@ -16210,7 +18632,26 @@
                 </a:solidFill>
                 <a:latin typeface="맑은 고딕"/>
               </a:rPr>
-              <a:t>•  `TopWaitEvents` 1위가 800만 → 정상 (유휴)</a:t>
+              <a:t>•  </a:t>
+            </a:r>
+            <a:r>
+              <a:rPr sz="1700" b="0">
+                <a:solidFill>
+                  <a:srgbClr val="222222"/>
+                </a:solidFill>
+                <a:latin typeface="Consolas"/>
+                <a:cs typeface="Consolas"/>
+              </a:rPr>
+              <a:t>TopWaitEvents</a:t>
+            </a:r>
+            <a:r>
+              <a:rPr sz="1700" b="0">
+                <a:solidFill>
+                  <a:srgbClr val="222222"/>
+                </a:solidFill>
+                <a:latin typeface="맑은 고딕"/>
+              </a:rPr>
+              <a:t> 1위가 800만 → 정상 (유휴)</a:t>
             </a:r>
           </a:p>
           <a:p>
@@ -16226,7 +18667,35 @@
                 </a:solidFill>
                 <a:latin typeface="맑은 고딕"/>
               </a:rPr>
-              <a:t>•  `ORA-16827` 인데 켜졌다 → **조치 필요**</a:t>
+              <a:t>•  </a:t>
+            </a:r>
+            <a:r>
+              <a:rPr sz="1700" b="0">
+                <a:solidFill>
+                  <a:srgbClr val="222222"/>
+                </a:solidFill>
+                <a:latin typeface="Consolas"/>
+                <a:cs typeface="Consolas"/>
+              </a:rPr>
+              <a:t>ORA-16827</a:t>
+            </a:r>
+            <a:r>
+              <a:rPr sz="1700" b="0">
+                <a:solidFill>
+                  <a:srgbClr val="222222"/>
+                </a:solidFill>
+                <a:latin typeface="맑은 고딕"/>
+              </a:rPr>
+              <a:t> 인데 켜졌다 → </a:t>
+            </a:r>
+            <a:r>
+              <a:rPr sz="1700" b="1">
+                <a:solidFill>
+                  <a:srgbClr val="222222"/>
+                </a:solidFill>
+                <a:latin typeface="맑은 고딕"/>
+              </a:rPr>
+              <a:t>조치 필요</a:t>
             </a:r>
           </a:p>
         </p:txBody>
@@ -16644,7 +19113,36 @@
                 </a:solidFill>
                 <a:latin typeface="맑은 고딕"/>
               </a:rPr>
-              <a:t>•  `DATABASE [VERBOSE]` / `... DATAFILE &lt;n&gt; OUTPUT=&lt;file&gt;`</a:t>
+              <a:t>•  </a:t>
+            </a:r>
+            <a:r>
+              <a:rPr sz="1700" b="0">
+                <a:solidFill>
+                  <a:srgbClr val="222222"/>
+                </a:solidFill>
+                <a:latin typeface="Consolas"/>
+                <a:cs typeface="Consolas"/>
+              </a:rPr>
+              <a:t>DATABASE [VERBOSE]</a:t>
+            </a:r>
+            <a:r>
+              <a:rPr sz="1700" b="0">
+                <a:solidFill>
+                  <a:srgbClr val="222222"/>
+                </a:solidFill>
+                <a:latin typeface="맑은 고딕"/>
+              </a:rPr>
+              <a:t> / </a:t>
+            </a:r>
+            <a:r>
+              <a:rPr sz="1700" b="0">
+                <a:solidFill>
+                  <a:srgbClr val="222222"/>
+                </a:solidFill>
+                <a:latin typeface="Consolas"/>
+                <a:cs typeface="Consolas"/>
+              </a:rPr>
+              <a:t>... DATAFILE &lt;n&gt; OUTPUT=&lt;file&gt;</a:t>
             </a:r>
           </a:p>
           <a:p>
@@ -16660,7 +19158,45 @@
                 </a:solidFill>
                 <a:latin typeface="맑은 고딕"/>
               </a:rPr>
-              <a:t>•  `... SPFILE` / `FAR_SYNC` (10장)</a:t>
+              <a:t>•  </a:t>
+            </a:r>
+            <a:r>
+              <a:rPr sz="1700" b="0">
+                <a:solidFill>
+                  <a:srgbClr val="222222"/>
+                </a:solidFill>
+                <a:latin typeface="Consolas"/>
+                <a:cs typeface="Consolas"/>
+              </a:rPr>
+              <a:t>... SPFILE</a:t>
+            </a:r>
+            <a:r>
+              <a:rPr sz="1700" b="0">
+                <a:solidFill>
+                  <a:srgbClr val="222222"/>
+                </a:solidFill>
+                <a:latin typeface="맑은 고딕"/>
+              </a:rPr>
+              <a:t> / </a:t>
+            </a:r>
+            <a:r>
+              <a:rPr sz="1700" b="0">
+                <a:solidFill>
+                  <a:srgbClr val="222222"/>
+                </a:solidFill>
+                <a:latin typeface="Consolas"/>
+                <a:cs typeface="Consolas"/>
+              </a:rPr>
+              <a:t>FAR_SYNC</a:t>
+            </a:r>
+            <a:r>
+              <a:rPr sz="1700" b="0">
+                <a:solidFill>
+                  <a:srgbClr val="222222"/>
+                </a:solidFill>
+                <a:latin typeface="맑은 고딕"/>
+              </a:rPr>
+              <a:t> (10장)</a:t>
             </a:r>
           </a:p>
           <a:p>
@@ -16676,7 +19212,17 @@
                 </a:solidFill>
                 <a:latin typeface="맑은 고딕"/>
               </a:rPr>
-              <a:t>•  `NETWORK CONFIGURATION FOR { ALL | &lt;member&gt; }`</a:t>
+              <a:t>•  </a:t>
+            </a:r>
+            <a:r>
+              <a:rPr sz="1700" b="0">
+                <a:solidFill>
+                  <a:srgbClr val="222222"/>
+                </a:solidFill>
+                <a:latin typeface="Consolas"/>
+                <a:cs typeface="Consolas"/>
+              </a:rPr>
+              <a:t>NETWORK CONFIGURATION FOR { ALL | &lt;member&gt; }</a:t>
             </a:r>
           </a:p>
           <a:p>
@@ -16692,7 +19238,17 @@
                 </a:solidFill>
                 <a:latin typeface="맑은 고딕"/>
               </a:rPr>
-              <a:t>•  `STATIC CONNECT IDENTIFIER FOR { ALL | &lt;database&gt; }`</a:t>
+              <a:t>•  </a:t>
+            </a:r>
+            <a:r>
+              <a:rPr sz="1700" b="0">
+                <a:solidFill>
+                  <a:srgbClr val="222222"/>
+                </a:solidFill>
+                <a:latin typeface="Consolas"/>
+                <a:cs typeface="Consolas"/>
+              </a:rPr>
+              <a:t>STATIC CONNECT IDENTIFIER FOR { ALL | &lt;database&gt; }</a:t>
             </a:r>
           </a:p>
         </p:txBody>
@@ -16871,7 +19427,25 @@
                 </a:solidFill>
                 <a:latin typeface="맑은 고딕"/>
               </a:rPr>
-              <a:t>•  결과물은 **대상(Standby) 쪽 trace** 에 생긴다</a:t>
+              <a:t>•  결과물은 </a:t>
+            </a:r>
+            <a:r>
+              <a:rPr sz="1700" b="1">
+                <a:solidFill>
+                  <a:srgbClr val="222222"/>
+                </a:solidFill>
+                <a:latin typeface="맑은 고딕"/>
+              </a:rPr>
+              <a:t>대상(Standby) 쪽 trace</a:t>
+            </a:r>
+            <a:r>
+              <a:rPr sz="1700" b="0">
+                <a:solidFill>
+                  <a:srgbClr val="222222"/>
+                </a:solidFill>
+                <a:latin typeface="맑은 고딕"/>
+              </a:rPr>
+              <a:t> 에 생긴다</a:t>
             </a:r>
           </a:p>
           <a:p>
@@ -16887,7 +19461,26 @@
                 </a:solidFill>
                 <a:latin typeface="맑은 고딕"/>
               </a:rPr>
-              <a:t>•  내용은 5장 실습 07 의 **`DBMS_DBCOMP`** 비교 결과</a:t>
+              <a:t>•  내용은 5장 실습 07 의 </a:t>
+            </a:r>
+            <a:r>
+              <a:rPr sz="1700" b="1">
+                <a:solidFill>
+                  <a:srgbClr val="222222"/>
+                </a:solidFill>
+                <a:latin typeface="Consolas"/>
+                <a:cs typeface="Consolas"/>
+              </a:rPr>
+              <a:t>DBMS_DBCOMP</a:t>
+            </a:r>
+            <a:r>
+              <a:rPr sz="1700" b="0">
+                <a:solidFill>
+                  <a:srgbClr val="222222"/>
+                </a:solidFill>
+                <a:latin typeface="맑은 고딕"/>
+              </a:rPr>
+              <a:t> 비교 결과</a:t>
             </a:r>
           </a:p>
           <a:p>
@@ -16903,7 +19496,101 @@
                 </a:solidFill>
                 <a:latin typeface="맑은 고딕"/>
               </a:rPr>
-              <a:t>•  `CORR`·`LWLOC`·`LWRMT`·`DIFFPAIR` 가 **0** 이어야 한다</a:t>
+              <a:t>•  </a:t>
+            </a:r>
+            <a:r>
+              <a:rPr sz="1700" b="0">
+                <a:solidFill>
+                  <a:srgbClr val="222222"/>
+                </a:solidFill>
+                <a:latin typeface="Consolas"/>
+                <a:cs typeface="Consolas"/>
+              </a:rPr>
+              <a:t>CORR</a:t>
+            </a:r>
+            <a:r>
+              <a:rPr sz="1700" b="0">
+                <a:solidFill>
+                  <a:srgbClr val="222222"/>
+                </a:solidFill>
+                <a:latin typeface="맑은 고딕"/>
+              </a:rPr>
+              <a:t>·</a:t>
+            </a:r>
+            <a:r>
+              <a:rPr sz="1700" b="0">
+                <a:solidFill>
+                  <a:srgbClr val="222222"/>
+                </a:solidFill>
+                <a:latin typeface="Consolas"/>
+                <a:cs typeface="Consolas"/>
+              </a:rPr>
+              <a:t>LWLOC</a:t>
+            </a:r>
+            <a:r>
+              <a:rPr sz="1700" b="0">
+                <a:solidFill>
+                  <a:srgbClr val="222222"/>
+                </a:solidFill>
+                <a:latin typeface="맑은 고딕"/>
+              </a:rPr>
+              <a:t>·</a:t>
+            </a:r>
+            <a:r>
+              <a:rPr sz="1700" b="0">
+                <a:solidFill>
+                  <a:srgbClr val="222222"/>
+                </a:solidFill>
+                <a:latin typeface="Consolas"/>
+                <a:cs typeface="Consolas"/>
+              </a:rPr>
+              <a:t>LWRMT</a:t>
+            </a:r>
+            <a:r>
+              <a:rPr sz="1700" b="0">
+                <a:solidFill>
+                  <a:srgbClr val="222222"/>
+                </a:solidFill>
+                <a:latin typeface="맑은 고딕"/>
+              </a:rPr>
+              <a:t>·</a:t>
+            </a:r>
+            <a:r>
+              <a:rPr sz="1700" b="0">
+                <a:solidFill>
+                  <a:srgbClr val="222222"/>
+                </a:solidFill>
+                <a:latin typeface="Consolas"/>
+                <a:cs typeface="Consolas"/>
+              </a:rPr>
+              <a:t>DIFFPAIR</a:t>
+            </a:r>
+            <a:r>
+              <a:rPr sz="1700" b="0">
+                <a:solidFill>
+                  <a:srgbClr val="222222"/>
+                </a:solidFill>
+                <a:latin typeface="맑은 고딕"/>
+              </a:rPr>
+              <a:t> 가 </a:t>
+            </a:r>
+            <a:r>
+              <a:rPr sz="1700" b="1">
+                <a:solidFill>
+                  <a:srgbClr val="222222"/>
+                </a:solidFill>
+                <a:latin typeface="맑은 고딕"/>
+              </a:rPr>
+              <a:t>0</a:t>
+            </a:r>
+            <a:r>
+              <a:rPr sz="1700" b="0">
+                <a:solidFill>
+                  <a:srgbClr val="222222"/>
+                </a:solidFill>
+                <a:latin typeface="맑은 고딕"/>
+              </a:rPr>
+              <a:t> 이어야 한다</a:t>
             </a:r>
           </a:p>
           <a:p>
@@ -16919,7 +19606,44 @@
                 </a:solidFill>
                 <a:latin typeface="맑은 고딕"/>
               </a:rPr>
-              <a:t>•  없는 파일 번호 → **ORA-53201** + `SYS.DBMS_DBCOMP` 스택</a:t>
+              <a:t>•  없는 파일 번호 → </a:t>
+            </a:r>
+            <a:r>
+              <a:rPr sz="1700" b="1">
+                <a:solidFill>
+                  <a:srgbClr val="222222"/>
+                </a:solidFill>
+                <a:latin typeface="맑은 고딕"/>
+              </a:rPr>
+              <a:t>ORA-53201</a:t>
+            </a:r>
+            <a:r>
+              <a:rPr sz="1700" b="0">
+                <a:solidFill>
+                  <a:srgbClr val="222222"/>
+                </a:solidFill>
+                <a:latin typeface="맑은 고딕"/>
+              </a:rPr>
+              <a:t> + </a:t>
+            </a:r>
+            <a:r>
+              <a:rPr sz="1700" b="0">
+                <a:solidFill>
+                  <a:srgbClr val="222222"/>
+                </a:solidFill>
+                <a:latin typeface="Consolas"/>
+                <a:cs typeface="Consolas"/>
+              </a:rPr>
+              <a:t>SYS.DBMS_DBCOMP</a:t>
+            </a:r>
+            <a:r>
+              <a:rPr sz="1700" b="0">
+                <a:solidFill>
+                  <a:srgbClr val="222222"/>
+                </a:solidFill>
+                <a:latin typeface="맑은 고딕"/>
+              </a:rPr>
+              <a:t> 스택</a:t>
             </a:r>
           </a:p>
         </p:txBody>
@@ -17098,7 +19822,44 @@
                 </a:solidFill>
                 <a:latin typeface="맑은 고딕"/>
               </a:rPr>
-              <a:t>•  `SHOW CONFIGURATION` — 지금 **의도대로** 동작하는가</a:t>
+              <a:t>•  </a:t>
+            </a:r>
+            <a:r>
+              <a:rPr sz="1700" b="0">
+                <a:solidFill>
+                  <a:srgbClr val="222222"/>
+                </a:solidFill>
+                <a:latin typeface="Consolas"/>
+                <a:cs typeface="Consolas"/>
+              </a:rPr>
+              <a:t>SHOW CONFIGURATION</a:t>
+            </a:r>
+            <a:r>
+              <a:rPr sz="1700" b="0">
+                <a:solidFill>
+                  <a:srgbClr val="222222"/>
+                </a:solidFill>
+                <a:latin typeface="맑은 고딕"/>
+              </a:rPr>
+              <a:t> — 지금 </a:t>
+            </a:r>
+            <a:r>
+              <a:rPr sz="1700" b="1">
+                <a:solidFill>
+                  <a:srgbClr val="222222"/>
+                </a:solidFill>
+                <a:latin typeface="맑은 고딕"/>
+              </a:rPr>
+              <a:t>의도대로</a:t>
+            </a:r>
+            <a:r>
+              <a:rPr sz="1700" b="0">
+                <a:solidFill>
+                  <a:srgbClr val="222222"/>
+                </a:solidFill>
+                <a:latin typeface="맑은 고딕"/>
+              </a:rPr>
+              <a:t> 동작하는가</a:t>
             </a:r>
           </a:p>
           <a:p>
@@ -17114,7 +19875,26 @@
                 </a:solidFill>
                 <a:latin typeface="맑은 고딕"/>
               </a:rPr>
-              <a:t>•  `SHOW DATABASE` — 이 멤버가 의도대로인가</a:t>
+              <a:t>•  </a:t>
+            </a:r>
+            <a:r>
+              <a:rPr sz="1700" b="0">
+                <a:solidFill>
+                  <a:srgbClr val="222222"/>
+                </a:solidFill>
+                <a:latin typeface="Consolas"/>
+                <a:cs typeface="Consolas"/>
+              </a:rPr>
+              <a:t>SHOW DATABASE</a:t>
+            </a:r>
+            <a:r>
+              <a:rPr sz="1700" b="0">
+                <a:solidFill>
+                  <a:srgbClr val="222222"/>
+                </a:solidFill>
+                <a:latin typeface="맑은 고딕"/>
+              </a:rPr>
+              <a:t> — 이 멤버가 의도대로인가</a:t>
             </a:r>
           </a:p>
           <a:p>
@@ -17130,7 +19910,35 @@
                 </a:solidFill>
                 <a:latin typeface="맑은 고딕"/>
               </a:rPr>
-              <a:t>•  `VALIDATE DATABASE` — 지금 **역할을 바꿀 수 있는가**</a:t>
+              <a:t>•  </a:t>
+            </a:r>
+            <a:r>
+              <a:rPr sz="1700" b="0">
+                <a:solidFill>
+                  <a:srgbClr val="222222"/>
+                </a:solidFill>
+                <a:latin typeface="Consolas"/>
+                <a:cs typeface="Consolas"/>
+              </a:rPr>
+              <a:t>VALIDATE DATABASE</a:t>
+            </a:r>
+            <a:r>
+              <a:rPr sz="1700" b="0">
+                <a:solidFill>
+                  <a:srgbClr val="222222"/>
+                </a:solidFill>
+                <a:latin typeface="맑은 고딕"/>
+              </a:rPr>
+              <a:t> — 지금 </a:t>
+            </a:r>
+            <a:r>
+              <a:rPr sz="1700" b="1">
+                <a:solidFill>
+                  <a:srgbClr val="222222"/>
+                </a:solidFill>
+                <a:latin typeface="맑은 고딕"/>
+              </a:rPr>
+              <a:t>역할을 바꿀 수 있는가</a:t>
             </a:r>
           </a:p>
           <a:p>
@@ -17325,7 +20133,54 @@
                 </a:solidFill>
                 <a:latin typeface="맑은 고딕"/>
               </a:rPr>
-              <a:t>•  `audit_file_dest` / `fal_client` — 다른 것이 **정상**</a:t>
+              <a:t>•  </a:t>
+            </a:r>
+            <a:r>
+              <a:rPr sz="1700" b="0">
+                <a:solidFill>
+                  <a:srgbClr val="222222"/>
+                </a:solidFill>
+                <a:latin typeface="Consolas"/>
+                <a:cs typeface="Consolas"/>
+              </a:rPr>
+              <a:t>audit_file_dest</a:t>
+            </a:r>
+            <a:r>
+              <a:rPr sz="1700" b="0">
+                <a:solidFill>
+                  <a:srgbClr val="222222"/>
+                </a:solidFill>
+                <a:latin typeface="맑은 고딕"/>
+              </a:rPr>
+              <a:t> / </a:t>
+            </a:r>
+            <a:r>
+              <a:rPr sz="1700" b="0">
+                <a:solidFill>
+                  <a:srgbClr val="222222"/>
+                </a:solidFill>
+                <a:latin typeface="Consolas"/>
+                <a:cs typeface="Consolas"/>
+              </a:rPr>
+              <a:t>fal_client</a:t>
+            </a:r>
+            <a:r>
+              <a:rPr sz="1700" b="0">
+                <a:solidFill>
+                  <a:srgbClr val="222222"/>
+                </a:solidFill>
+                <a:latin typeface="맑은 고딕"/>
+              </a:rPr>
+              <a:t> — 다른 것이 </a:t>
+            </a:r>
+            <a:r>
+              <a:rPr sz="1700" b="1">
+                <a:solidFill>
+                  <a:srgbClr val="222222"/>
+                </a:solidFill>
+                <a:latin typeface="맑은 고딕"/>
+              </a:rPr>
+              <a:t>정상</a:t>
             </a:r>
           </a:p>
           <a:p>
@@ -17341,7 +20196,44 @@
                 </a:solidFill>
                 <a:latin typeface="맑은 고딕"/>
               </a:rPr>
-              <a:t>•  `diagnostic_dest` — **끝의 슬래시 하나** 차이</a:t>
+              <a:t>•  </a:t>
+            </a:r>
+            <a:r>
+              <a:rPr sz="1700" b="0">
+                <a:solidFill>
+                  <a:srgbClr val="222222"/>
+                </a:solidFill>
+                <a:latin typeface="Consolas"/>
+                <a:cs typeface="Consolas"/>
+              </a:rPr>
+              <a:t>diagnostic_dest</a:t>
+            </a:r>
+            <a:r>
+              <a:rPr sz="1700" b="0">
+                <a:solidFill>
+                  <a:srgbClr val="222222"/>
+                </a:solidFill>
+                <a:latin typeface="맑은 고딕"/>
+              </a:rPr>
+              <a:t> — </a:t>
+            </a:r>
+            <a:r>
+              <a:rPr sz="1700" b="1">
+                <a:solidFill>
+                  <a:srgbClr val="222222"/>
+                </a:solidFill>
+                <a:latin typeface="맑은 고딕"/>
+              </a:rPr>
+              <a:t>끝의 슬래시 하나</a:t>
+            </a:r>
+            <a:r>
+              <a:rPr sz="1700" b="0">
+                <a:solidFill>
+                  <a:srgbClr val="222222"/>
+                </a:solidFill>
+                <a:latin typeface="맑은 고딕"/>
+              </a:rPr>
+              <a:t> 차이</a:t>
             </a:r>
           </a:p>
           <a:p>
@@ -17357,7 +20249,55 @@
                 </a:solidFill>
                 <a:latin typeface="맑은 고딕"/>
               </a:rPr>
-              <a:t>•  `log_archive_trace` — chicago `0` / boston `NOT SPECIFIED`</a:t>
+              <a:t>•  </a:t>
+            </a:r>
+            <a:r>
+              <a:rPr sz="1700" b="0">
+                <a:solidFill>
+                  <a:srgbClr val="222222"/>
+                </a:solidFill>
+                <a:latin typeface="Consolas"/>
+                <a:cs typeface="Consolas"/>
+              </a:rPr>
+              <a:t>log_archive_trace</a:t>
+            </a:r>
+            <a:r>
+              <a:rPr sz="1700" b="0">
+                <a:solidFill>
+                  <a:srgbClr val="222222"/>
+                </a:solidFill>
+                <a:latin typeface="맑은 고딕"/>
+              </a:rPr>
+              <a:t> — chicago </a:t>
+            </a:r>
+            <a:r>
+              <a:rPr sz="1700" b="0">
+                <a:solidFill>
+                  <a:srgbClr val="222222"/>
+                </a:solidFill>
+                <a:latin typeface="Consolas"/>
+                <a:cs typeface="Consolas"/>
+              </a:rPr>
+              <a:t>0</a:t>
+            </a:r>
+            <a:r>
+              <a:rPr sz="1700" b="0">
+                <a:solidFill>
+                  <a:srgbClr val="222222"/>
+                </a:solidFill>
+                <a:latin typeface="맑은 고딕"/>
+              </a:rPr>
+              <a:t> / boston </a:t>
+            </a:r>
+            <a:r>
+              <a:rPr sz="1700" b="0">
+                <a:solidFill>
+                  <a:srgbClr val="222222"/>
+                </a:solidFill>
+                <a:latin typeface="Consolas"/>
+                <a:cs typeface="Consolas"/>
+              </a:rPr>
+              <a:t>NOT SPECIFIED</a:t>
             </a:r>
           </a:p>
           <a:p>
@@ -17373,7 +20313,25 @@
                 </a:solidFill>
                 <a:latin typeface="맑은 고딕"/>
               </a:rPr>
-              <a:t>•  전부 고치는 것이 아니라 **읽고 판정하는 것**이 목적</a:t>
+              <a:t>•  전부 고치는 것이 아니라 </a:t>
+            </a:r>
+            <a:r>
+              <a:rPr sz="1700" b="1">
+                <a:solidFill>
+                  <a:srgbClr val="222222"/>
+                </a:solidFill>
+                <a:latin typeface="맑은 고딕"/>
+              </a:rPr>
+              <a:t>읽고 판정하는 것</a:t>
+            </a:r>
+            <a:r>
+              <a:rPr sz="1700" b="0">
+                <a:solidFill>
+                  <a:srgbClr val="222222"/>
+                </a:solidFill>
+                <a:latin typeface="맑은 고딕"/>
+              </a:rPr>
+              <a:t>이 목적</a:t>
             </a:r>
           </a:p>
         </p:txBody>
@@ -17568,7 +20526,45 @@
                 </a:solidFill>
                 <a:latin typeface="맑은 고딕"/>
               </a:rPr>
-              <a:t>•  `VALIDATE STATIC CONNECT IDENTIFIER` → **`ORA-12514` Failed**</a:t>
+              <a:t>•  </a:t>
+            </a:r>
+            <a:r>
+              <a:rPr sz="1700" b="0">
+                <a:solidFill>
+                  <a:srgbClr val="222222"/>
+                </a:solidFill>
+                <a:latin typeface="Consolas"/>
+                <a:cs typeface="Consolas"/>
+              </a:rPr>
+              <a:t>VALIDATE STATIC CONNECT IDENTIFIER</a:t>
+            </a:r>
+            <a:r>
+              <a:rPr sz="1700" b="0">
+                <a:solidFill>
+                  <a:srgbClr val="222222"/>
+                </a:solidFill>
+                <a:latin typeface="맑은 고딕"/>
+              </a:rPr>
+              <a:t> → </a:t>
+            </a:r>
+            <a:r>
+              <a:rPr sz="1700" b="1">
+                <a:solidFill>
+                  <a:srgbClr val="222222"/>
+                </a:solidFill>
+                <a:latin typeface="Consolas"/>
+                <a:cs typeface="Consolas"/>
+              </a:rPr>
+              <a:t>ORA-12514</a:t>
+            </a:r>
+            <a:r>
+              <a:rPr sz="1700" b="1">
+                <a:solidFill>
+                  <a:srgbClr val="222222"/>
+                </a:solidFill>
+                <a:latin typeface="맑은 고딕"/>
+              </a:rPr>
+              <a:t> Failed</a:t>
             </a:r>
           </a:p>
           <a:p>
@@ -17584,7 +20580,36 @@
                 </a:solidFill>
                 <a:latin typeface="맑은 고딕"/>
               </a:rPr>
-              <a:t>•  그런데 `VALIDATE DATABASE` → **`Ready for Switchover: Yes`**</a:t>
+              <a:t>•  그런데 </a:t>
+            </a:r>
+            <a:r>
+              <a:rPr sz="1700" b="0">
+                <a:solidFill>
+                  <a:srgbClr val="222222"/>
+                </a:solidFill>
+                <a:latin typeface="Consolas"/>
+                <a:cs typeface="Consolas"/>
+              </a:rPr>
+              <a:t>VALIDATE DATABASE</a:t>
+            </a:r>
+            <a:r>
+              <a:rPr sz="1700" b="0">
+                <a:solidFill>
+                  <a:srgbClr val="222222"/>
+                </a:solidFill>
+                <a:latin typeface="맑은 고딕"/>
+              </a:rPr>
+              <a:t> → </a:t>
+            </a:r>
+            <a:r>
+              <a:rPr sz="1700" b="1">
+                <a:solidFill>
+                  <a:srgbClr val="222222"/>
+                </a:solidFill>
+                <a:latin typeface="Consolas"/>
+                <a:cs typeface="Consolas"/>
+              </a:rPr>
+              <a:t>Ready for Switchover: Yes</a:t>
             </a:r>
           </a:p>
           <a:p>
@@ -17600,7 +20625,36 @@
                 </a:solidFill>
                 <a:latin typeface="맑은 고딕"/>
               </a:rPr>
-              <a:t>•  `SHOW CONFIGURATION` → **`SUCCESS`**</a:t>
+              <a:t>•  </a:t>
+            </a:r>
+            <a:r>
+              <a:rPr sz="1700" b="0">
+                <a:solidFill>
+                  <a:srgbClr val="222222"/>
+                </a:solidFill>
+                <a:latin typeface="Consolas"/>
+                <a:cs typeface="Consolas"/>
+              </a:rPr>
+              <a:t>SHOW CONFIGURATION</a:t>
+            </a:r>
+            <a:r>
+              <a:rPr sz="1700" b="0">
+                <a:solidFill>
+                  <a:srgbClr val="222222"/>
+                </a:solidFill>
+                <a:latin typeface="맑은 고딕"/>
+              </a:rPr>
+              <a:t> → </a:t>
+            </a:r>
+            <a:r>
+              <a:rPr sz="1700" b="1">
+                <a:solidFill>
+                  <a:srgbClr val="222222"/>
+                </a:solidFill>
+                <a:latin typeface="Consolas"/>
+                <a:cs typeface="Consolas"/>
+              </a:rPr>
+              <a:t>SUCCESS</a:t>
             </a:r>
           </a:p>
         </p:txBody>
@@ -17779,7 +20833,16 @@
                 </a:solidFill>
                 <a:latin typeface="맑은 고딕"/>
               </a:rPr>
-              <a:t>•  위치는 알림 로그와 같은 **ADR 의 trace**</a:t>
+              <a:t>•  위치는 알림 로그와 같은 </a:t>
+            </a:r>
+            <a:r>
+              <a:rPr sz="1700" b="1">
+                <a:solidFill>
+                  <a:srgbClr val="222222"/>
+                </a:solidFill>
+                <a:latin typeface="맑은 고딕"/>
+              </a:rPr>
+              <a:t>ADR 의 trace</a:t>
             </a:r>
           </a:p>
           <a:p>
@@ -17795,7 +20858,44 @@
                 </a:solidFill>
                 <a:latin typeface="맑은 고딕"/>
               </a:rPr>
-              <a:t>•  **명령과 결과가 한 쌍**으로 남는다 (`... completed with error ORA-16568`)</a:t>
+              <a:t>•  </a:t>
+            </a:r>
+            <a:r>
+              <a:rPr sz="1700" b="1">
+                <a:solidFill>
+                  <a:srgbClr val="222222"/>
+                </a:solidFill>
+                <a:latin typeface="맑은 고딕"/>
+              </a:rPr>
+              <a:t>명령과 결과가 한 쌍</a:t>
+            </a:r>
+            <a:r>
+              <a:rPr sz="1700" b="0">
+                <a:solidFill>
+                  <a:srgbClr val="222222"/>
+                </a:solidFill>
+                <a:latin typeface="맑은 고딕"/>
+              </a:rPr>
+              <a:t>으로 남는다 (</a:t>
+            </a:r>
+            <a:r>
+              <a:rPr sz="1700" b="0">
+                <a:solidFill>
+                  <a:srgbClr val="222222"/>
+                </a:solidFill>
+                <a:latin typeface="Consolas"/>
+                <a:cs typeface="Consolas"/>
+              </a:rPr>
+              <a:t>... completed with error ORA-16568</a:t>
+            </a:r>
+            <a:r>
+              <a:rPr sz="1700" b="0">
+                <a:solidFill>
+                  <a:srgbClr val="222222"/>
+                </a:solidFill>
+                <a:latin typeface="맑은 고딕"/>
+              </a:rPr>
+              <a:t>)</a:t>
             </a:r>
           </a:p>
           <a:p>
@@ -17811,7 +20911,54 @@
                 </a:solidFill>
                 <a:latin typeface="맑은 고딕"/>
               </a:rPr>
-              <a:t>•  화면에 없는 **구성 수준 오류 번호** — `ORA-16607`·`ORA-16608`</a:t>
+              <a:t>•  화면에 없는 </a:t>
+            </a:r>
+            <a:r>
+              <a:rPr sz="1700" b="1">
+                <a:solidFill>
+                  <a:srgbClr val="222222"/>
+                </a:solidFill>
+                <a:latin typeface="맑은 고딕"/>
+              </a:rPr>
+              <a:t>구성 수준 오류 번호</a:t>
+            </a:r>
+            <a:r>
+              <a:rPr sz="1700" b="0">
+                <a:solidFill>
+                  <a:srgbClr val="222222"/>
+                </a:solidFill>
+                <a:latin typeface="맑은 고딕"/>
+              </a:rPr>
+              <a:t> — </a:t>
+            </a:r>
+            <a:r>
+              <a:rPr sz="1700" b="0">
+                <a:solidFill>
+                  <a:srgbClr val="222222"/>
+                </a:solidFill>
+                <a:latin typeface="Consolas"/>
+                <a:cs typeface="Consolas"/>
+              </a:rPr>
+              <a:t>ORA-16607</a:t>
+            </a:r>
+            <a:r>
+              <a:rPr sz="1700" b="0">
+                <a:solidFill>
+                  <a:srgbClr val="222222"/>
+                </a:solidFill>
+                <a:latin typeface="맑은 고딕"/>
+              </a:rPr>
+              <a:t>·</a:t>
+            </a:r>
+            <a:r>
+              <a:rPr sz="1700" b="0">
+                <a:solidFill>
+                  <a:srgbClr val="222222"/>
+                </a:solidFill>
+                <a:latin typeface="Consolas"/>
+                <a:cs typeface="Consolas"/>
+              </a:rPr>
+              <a:t>ORA-16608</a:t>
             </a:r>
           </a:p>
           <a:p>
@@ -17827,7 +20974,45 @@
                 </a:solidFill>
                 <a:latin typeface="맑은 고딕"/>
               </a:rPr>
-              <a:t>•  정상은 **`ORA-0`**. Broker 가 스스로 실행한 `IncarnationTable` 도 남는다</a:t>
+              <a:t>•  정상은 </a:t>
+            </a:r>
+            <a:r>
+              <a:rPr sz="1700" b="1">
+                <a:solidFill>
+                  <a:srgbClr val="222222"/>
+                </a:solidFill>
+                <a:latin typeface="Consolas"/>
+                <a:cs typeface="Consolas"/>
+              </a:rPr>
+              <a:t>ORA-0</a:t>
+            </a:r>
+            <a:r>
+              <a:rPr sz="1700" b="0">
+                <a:solidFill>
+                  <a:srgbClr val="222222"/>
+                </a:solidFill>
+                <a:latin typeface="맑은 고딕"/>
+              </a:rPr>
+              <a:t>. Broker 가 스스로 실행한 </a:t>
+            </a:r>
+            <a:r>
+              <a:rPr sz="1700" b="0">
+                <a:solidFill>
+                  <a:srgbClr val="222222"/>
+                </a:solidFill>
+                <a:latin typeface="Consolas"/>
+                <a:cs typeface="Consolas"/>
+              </a:rPr>
+              <a:t>IncarnationTable</a:t>
+            </a:r>
+            <a:r>
+              <a:rPr sz="1700" b="0">
+                <a:solidFill>
+                  <a:srgbClr val="222222"/>
+                </a:solidFill>
+                <a:latin typeface="맑은 고딕"/>
+              </a:rPr>
+              <a:t> 도 남는다</a:t>
             </a:r>
           </a:p>
         </p:txBody>
@@ -17967,7 +21152,45 @@
                 </a:solidFill>
                 <a:latin typeface="맑은 고딕"/>
               </a:rPr>
-              <a:t>•  `SHOW` 는 "의도대로인가", `VALIDATE` 는 "전환할 수 있는가"</a:t>
+              <a:t>•  </a:t>
+            </a:r>
+            <a:r>
+              <a:rPr sz="1600" b="0">
+                <a:solidFill>
+                  <a:srgbClr val="222222"/>
+                </a:solidFill>
+                <a:latin typeface="Consolas"/>
+                <a:cs typeface="Consolas"/>
+              </a:rPr>
+              <a:t>SHOW</a:t>
+            </a:r>
+            <a:r>
+              <a:rPr sz="1600" b="0">
+                <a:solidFill>
+                  <a:srgbClr val="222222"/>
+                </a:solidFill>
+                <a:latin typeface="맑은 고딕"/>
+              </a:rPr>
+              <a:t> 는 "의도대로인가", </a:t>
+            </a:r>
+            <a:r>
+              <a:rPr sz="1600" b="0">
+                <a:solidFill>
+                  <a:srgbClr val="222222"/>
+                </a:solidFill>
+                <a:latin typeface="Consolas"/>
+                <a:cs typeface="Consolas"/>
+              </a:rPr>
+              <a:t>VALIDATE</a:t>
+            </a:r>
+            <a:r>
+              <a:rPr sz="1600" b="0">
+                <a:solidFill>
+                  <a:srgbClr val="222222"/>
+                </a:solidFill>
+                <a:latin typeface="맑은 고딕"/>
+              </a:rPr>
+              <a:t> 는 "전환할 수 있는가"</a:t>
             </a:r>
           </a:p>
           <a:p>
@@ -17983,7 +21206,45 @@
                 </a:solidFill>
                 <a:latin typeface="맑은 고딕"/>
               </a:rPr>
-              <a:t>•  실측 — `LogShipping=OFF` 인데 `SUCCESS`, 두 지연도 0</a:t>
+              <a:t>•  실측 — </a:t>
+            </a:r>
+            <a:r>
+              <a:rPr sz="1600" b="0">
+                <a:solidFill>
+                  <a:srgbClr val="222222"/>
+                </a:solidFill>
+                <a:latin typeface="Consolas"/>
+                <a:cs typeface="Consolas"/>
+              </a:rPr>
+              <a:t>LogShipping=OFF</a:t>
+            </a:r>
+            <a:r>
+              <a:rPr sz="1600" b="0">
+                <a:solidFill>
+                  <a:srgbClr val="222222"/>
+                </a:solidFill>
+                <a:latin typeface="맑은 고딕"/>
+              </a:rPr>
+              <a:t> 인데 </a:t>
+            </a:r>
+            <a:r>
+              <a:rPr sz="1600" b="0">
+                <a:solidFill>
+                  <a:srgbClr val="222222"/>
+                </a:solidFill>
+                <a:latin typeface="Consolas"/>
+                <a:cs typeface="Consolas"/>
+              </a:rPr>
+              <a:t>SUCCESS</a:t>
+            </a:r>
+            <a:r>
+              <a:rPr sz="1600" b="0">
+                <a:solidFill>
+                  <a:srgbClr val="222222"/>
+                </a:solidFill>
+                <a:latin typeface="맑은 고딕"/>
+              </a:rPr>
+              <a:t>, 두 지연도 0</a:t>
             </a:r>
           </a:p>
           <a:p>
@@ -17999,7 +21260,45 @@
                 </a:solidFill>
                 <a:latin typeface="맑은 고딕"/>
               </a:rPr>
-              <a:t>•  Broker 는 `DEFER` 가 아니라 **`RESET`** 을 쓴다</a:t>
+              <a:t>•  Broker 는 </a:t>
+            </a:r>
+            <a:r>
+              <a:rPr sz="1600" b="0">
+                <a:solidFill>
+                  <a:srgbClr val="222222"/>
+                </a:solidFill>
+                <a:latin typeface="Consolas"/>
+                <a:cs typeface="Consolas"/>
+              </a:rPr>
+              <a:t>DEFER</a:t>
+            </a:r>
+            <a:r>
+              <a:rPr sz="1600" b="0">
+                <a:solidFill>
+                  <a:srgbClr val="222222"/>
+                </a:solidFill>
+                <a:latin typeface="맑은 고딕"/>
+              </a:rPr>
+              <a:t> 가 아니라 </a:t>
+            </a:r>
+            <a:r>
+              <a:rPr sz="1600" b="1">
+                <a:solidFill>
+                  <a:srgbClr val="222222"/>
+                </a:solidFill>
+                <a:latin typeface="Consolas"/>
+                <a:cs typeface="Consolas"/>
+              </a:rPr>
+              <a:t>RESET</a:t>
+            </a:r>
+            <a:r>
+              <a:rPr sz="1600" b="0">
+                <a:solidFill>
+                  <a:srgbClr val="222222"/>
+                </a:solidFill>
+                <a:latin typeface="맑은 고딕"/>
+              </a:rPr>
+              <a:t> 을 쓴다</a:t>
             </a:r>
           </a:p>
           <a:p>
@@ -18015,7 +21314,45 @@
                 </a:solidFill>
                 <a:latin typeface="맑은 고딕"/>
               </a:rPr>
-              <a:t>•  `VERBOSE` 는 `Future` 구성까지 계산한다</a:t>
+              <a:t>•  </a:t>
+            </a:r>
+            <a:r>
+              <a:rPr sz="1600" b="0">
+                <a:solidFill>
+                  <a:srgbClr val="222222"/>
+                </a:solidFill>
+                <a:latin typeface="Consolas"/>
+                <a:cs typeface="Consolas"/>
+              </a:rPr>
+              <a:t>VERBOSE</a:t>
+            </a:r>
+            <a:r>
+              <a:rPr sz="1600" b="0">
+                <a:solidFill>
+                  <a:srgbClr val="222222"/>
+                </a:solidFill>
+                <a:latin typeface="맑은 고딕"/>
+              </a:rPr>
+              <a:t> 는 </a:t>
+            </a:r>
+            <a:r>
+              <a:rPr sz="1600" b="0">
+                <a:solidFill>
+                  <a:srgbClr val="222222"/>
+                </a:solidFill>
+                <a:latin typeface="Consolas"/>
+                <a:cs typeface="Consolas"/>
+              </a:rPr>
+              <a:t>Future</a:t>
+            </a:r>
+            <a:r>
+              <a:rPr sz="1600" b="0">
+                <a:solidFill>
+                  <a:srgbClr val="222222"/>
+                </a:solidFill>
+                <a:latin typeface="맑은 고딕"/>
+              </a:rPr>
+              <a:t> 구성까지 계산한다</a:t>
             </a:r>
           </a:p>
           <a:p>
@@ -18047,7 +21384,16 @@
                 </a:solidFill>
                 <a:latin typeface="맑은 고딕"/>
               </a:rPr>
-              <a:t>•  **임계값이 있는 항목만 경보한다**</a:t>
+              <a:t>•  </a:t>
+            </a:r>
+            <a:r>
+              <a:rPr sz="1600" b="1">
+                <a:solidFill>
+                  <a:srgbClr val="222222"/>
+                </a:solidFill>
+                <a:latin typeface="맑은 고딕"/>
+              </a:rPr>
+              <a:t>임계값이 있는 항목만 경보한다</a:t>
             </a:r>
           </a:p>
           <a:p>
@@ -18063,7 +21409,26 @@
                 </a:solidFill>
                 <a:latin typeface="맑은 고딕"/>
               </a:rPr>
-              <a:t>•  `EXPORT` 는 trace 디렉터리. 경로를 주면 ORA-16540</a:t>
+              <a:t>•  </a:t>
+            </a:r>
+            <a:r>
+              <a:rPr sz="1600" b="0">
+                <a:solidFill>
+                  <a:srgbClr val="222222"/>
+                </a:solidFill>
+                <a:latin typeface="Consolas"/>
+                <a:cs typeface="Consolas"/>
+              </a:rPr>
+              <a:t>EXPORT</a:t>
+            </a:r>
+            <a:r>
+              <a:rPr sz="1600" b="0">
+                <a:solidFill>
+                  <a:srgbClr val="222222"/>
+                </a:solidFill>
+                <a:latin typeface="맑은 고딕"/>
+              </a:rPr>
+              <a:t> 는 trace 디렉터리. 경로를 주면 ORA-16540</a:t>
             </a:r>
           </a:p>
           <a:p>
@@ -18079,7 +21444,26 @@
                 </a:solidFill>
                 <a:latin typeface="맑은 고딕"/>
               </a:rPr>
-              <a:t>•  `IMPORT` 는 구성이 있으면 ORA-16504</a:t>
+              <a:t>•  </a:t>
+            </a:r>
+            <a:r>
+              <a:rPr sz="1600" b="0">
+                <a:solidFill>
+                  <a:srgbClr val="222222"/>
+                </a:solidFill>
+                <a:latin typeface="Consolas"/>
+                <a:cs typeface="Consolas"/>
+              </a:rPr>
+              <a:t>IMPORT</a:t>
+            </a:r>
+            <a:r>
+              <a:rPr sz="1600" b="0">
+                <a:solidFill>
+                  <a:srgbClr val="222222"/>
+                </a:solidFill>
+                <a:latin typeface="맑은 고딕"/>
+              </a:rPr>
+              <a:t> 는 구성이 있으면 ORA-16504</a:t>
             </a:r>
           </a:p>
           <a:p>
@@ -18111,7 +21495,26 @@
                 </a:solidFill>
                 <a:latin typeface="맑은 고딕"/>
               </a:rPr>
-              <a:t>•  끌 때는 **`DISABLE` 이 먼저**</a:t>
+              <a:t>•  끌 때는 </a:t>
+            </a:r>
+            <a:r>
+              <a:rPr sz="1600" b="1">
+                <a:solidFill>
+                  <a:srgbClr val="222222"/>
+                </a:solidFill>
+                <a:latin typeface="Consolas"/>
+                <a:cs typeface="Consolas"/>
+              </a:rPr>
+              <a:t>DISABLE</a:t>
+            </a:r>
+            <a:r>
+              <a:rPr sz="1600" b="1">
+                <a:solidFill>
+                  <a:srgbClr val="222222"/>
+                </a:solidFill>
+                <a:latin typeface="맑은 고딕"/>
+              </a:rPr>
+              <a:t> 이 먼저</a:t>
             </a:r>
           </a:p>
           <a:p>
@@ -18127,7 +21530,16 @@
                 </a:solidFill>
                 <a:latin typeface="맑은 고딕"/>
               </a:rPr>
-              <a:t>•  감시 다섯 층 중 **4층을 빠뜨리는 것이 가장 흔한 실수**</a:t>
+              <a:t>•  감시 다섯 층 중 </a:t>
+            </a:r>
+            <a:r>
+              <a:rPr sz="1600" b="1">
+                <a:solidFill>
+                  <a:srgbClr val="222222"/>
+                </a:solidFill>
+                <a:latin typeface="맑은 고딕"/>
+              </a:rPr>
+              <a:t>4층을 빠뜨리는 것이 가장 흔한 실수</a:t>
             </a:r>
           </a:p>
           <a:p>
@@ -18143,7 +21555,54 @@
                 </a:solidFill>
                 <a:latin typeface="맑은 고딕"/>
               </a:rPr>
-              <a:t>•  `VALIDATE` 는 여섯 구문. **★ `VALIDATE DATABASE` 는 Primary 의 정적 등록만 검사한다**</a:t>
+              <a:t>•  </a:t>
+            </a:r>
+            <a:r>
+              <a:rPr sz="1600" b="0">
+                <a:solidFill>
+                  <a:srgbClr val="222222"/>
+                </a:solidFill>
+                <a:latin typeface="Consolas"/>
+                <a:cs typeface="Consolas"/>
+              </a:rPr>
+              <a:t>VALIDATE</a:t>
+            </a:r>
+            <a:r>
+              <a:rPr sz="1600" b="0">
+                <a:solidFill>
+                  <a:srgbClr val="222222"/>
+                </a:solidFill>
+                <a:latin typeface="맑은 고딕"/>
+              </a:rPr>
+              <a:t> 는 여섯 구문. </a:t>
+            </a:r>
+            <a:r>
+              <a:rPr sz="1600" b="1">
+                <a:solidFill>
+                  <a:srgbClr val="222222"/>
+                </a:solidFill>
+                <a:latin typeface="맑은 고딕"/>
+              </a:rPr>
+              <a:t>★ </a:t>
+            </a:r>
+            <a:r>
+              <a:rPr sz="1600" b="1">
+                <a:solidFill>
+                  <a:srgbClr val="222222"/>
+                </a:solidFill>
+                <a:latin typeface="Consolas"/>
+                <a:cs typeface="Consolas"/>
+              </a:rPr>
+              <a:t>VALIDATE DATABASE</a:t>
+            </a:r>
+            <a:r>
+              <a:rPr sz="1600" b="1">
+                <a:solidFill>
+                  <a:srgbClr val="222222"/>
+                </a:solidFill>
+                <a:latin typeface="맑은 고딕"/>
+              </a:rPr>
+              <a:t> 는 Primary 의 정적 등록만 검사한다</a:t>
             </a:r>
           </a:p>
           <a:p>
@@ -18159,7 +21618,44 @@
                 </a:solidFill>
                 <a:latin typeface="맑은 고딕"/>
               </a:rPr>
-              <a:t>•  `drc&lt;이름&gt;.log` 에 명령·결과와 **구성 수준 오류**(ORA-16607·16608)가 남는다</a:t>
+              <a:t>•  </a:t>
+            </a:r>
+            <a:r>
+              <a:rPr sz="1600" b="0">
+                <a:solidFill>
+                  <a:srgbClr val="222222"/>
+                </a:solidFill>
+                <a:latin typeface="Consolas"/>
+                <a:cs typeface="Consolas"/>
+              </a:rPr>
+              <a:t>drc&lt;이름&gt;.log</a:t>
+            </a:r>
+            <a:r>
+              <a:rPr sz="1600" b="0">
+                <a:solidFill>
+                  <a:srgbClr val="222222"/>
+                </a:solidFill>
+                <a:latin typeface="맑은 고딕"/>
+              </a:rPr>
+              <a:t> 에 명령·결과와 </a:t>
+            </a:r>
+            <a:r>
+              <a:rPr sz="1600" b="1">
+                <a:solidFill>
+                  <a:srgbClr val="222222"/>
+                </a:solidFill>
+                <a:latin typeface="맑은 고딕"/>
+              </a:rPr>
+              <a:t>구성 수준 오류</a:t>
+            </a:r>
+            <a:r>
+              <a:rPr sz="1600" b="0">
+                <a:solidFill>
+                  <a:srgbClr val="222222"/>
+                </a:solidFill>
+                <a:latin typeface="맑은 고딕"/>
+              </a:rPr>
+              <a:t>(ORA-16607·16608)가 남는다</a:t>
             </a:r>
           </a:p>
         </p:txBody>
@@ -18526,7 +22022,17 @@
                 </a:solidFill>
                 <a:latin typeface="맑은 고딕"/>
               </a:rPr>
-              <a:t>•  `edit database 'boston' set property 'LogShipping'='OFF'`</a:t>
+              <a:t>•  </a:t>
+            </a:r>
+            <a:r>
+              <a:rPr sz="1700" b="0">
+                <a:solidFill>
+                  <a:srgbClr val="222222"/>
+                </a:solidFill>
+                <a:latin typeface="Consolas"/>
+                <a:cs typeface="Consolas"/>
+              </a:rPr>
+              <a:t>edit database 'boston' set property 'LogShipping'='OFF'</a:t>
             </a:r>
           </a:p>
           <a:p>
@@ -18558,7 +22064,35 @@
                 </a:solidFill>
                 <a:latin typeface="맑은 고딕"/>
               </a:rPr>
-              <a:t>•  `SHOW CONFIGURATION` → **SUCCESS**</a:t>
+              <a:t>•  </a:t>
+            </a:r>
+            <a:r>
+              <a:rPr sz="1700" b="0">
+                <a:solidFill>
+                  <a:srgbClr val="222222"/>
+                </a:solidFill>
+                <a:latin typeface="Consolas"/>
+                <a:cs typeface="Consolas"/>
+              </a:rPr>
+              <a:t>SHOW CONFIGURATION</a:t>
+            </a:r>
+            <a:r>
+              <a:rPr sz="1700" b="0">
+                <a:solidFill>
+                  <a:srgbClr val="222222"/>
+                </a:solidFill>
+                <a:latin typeface="맑은 고딕"/>
+              </a:rPr>
+              <a:t> → </a:t>
+            </a:r>
+            <a:r>
+              <a:rPr sz="1700" b="1">
+                <a:solidFill>
+                  <a:srgbClr val="222222"/>
+                </a:solidFill>
+                <a:latin typeface="맑은 고딕"/>
+              </a:rPr>
+              <a:t>SUCCESS</a:t>
             </a:r>
           </a:p>
           <a:p>
@@ -18574,7 +22108,35 @@
                 </a:solidFill>
                 <a:latin typeface="맑은 고딕"/>
               </a:rPr>
-              <a:t>•  `SHOW DATABASE 'boston'` → **SUCCESS**</a:t>
+              <a:t>•  </a:t>
+            </a:r>
+            <a:r>
+              <a:rPr sz="1700" b="0">
+                <a:solidFill>
+                  <a:srgbClr val="222222"/>
+                </a:solidFill>
+                <a:latin typeface="Consolas"/>
+                <a:cs typeface="Consolas"/>
+              </a:rPr>
+              <a:t>SHOW DATABASE 'boston'</a:t>
+            </a:r>
+            <a:r>
+              <a:rPr sz="1700" b="0">
+                <a:solidFill>
+                  <a:srgbClr val="222222"/>
+                </a:solidFill>
+                <a:latin typeface="맑은 고딕"/>
+              </a:rPr>
+              <a:t> → </a:t>
+            </a:r>
+            <a:r>
+              <a:rPr sz="1700" b="1">
+                <a:solidFill>
+                  <a:srgbClr val="222222"/>
+                </a:solidFill>
+                <a:latin typeface="맑은 고딕"/>
+              </a:rPr>
+              <a:t>SUCCESS</a:t>
             </a:r>
           </a:p>
           <a:p>
@@ -18590,7 +22152,34 @@
                 </a:solidFill>
                 <a:latin typeface="맑은 고딕"/>
               </a:rPr>
-              <a:t>•  Transport Lag **0** / Apply Lag **0**</a:t>
+              <a:t>•  Transport Lag </a:t>
+            </a:r>
+            <a:r>
+              <a:rPr sz="1700" b="1">
+                <a:solidFill>
+                  <a:srgbClr val="222222"/>
+                </a:solidFill>
+                <a:latin typeface="맑은 고딕"/>
+              </a:rPr>
+              <a:t>0</a:t>
+            </a:r>
+            <a:r>
+              <a:rPr sz="1700" b="0">
+                <a:solidFill>
+                  <a:srgbClr val="222222"/>
+                </a:solidFill>
+                <a:latin typeface="맑은 고딕"/>
+              </a:rPr>
+              <a:t> / Apply Lag </a:t>
+            </a:r>
+            <a:r>
+              <a:rPr sz="1700" b="1">
+                <a:solidFill>
+                  <a:srgbClr val="222222"/>
+                </a:solidFill>
+                <a:latin typeface="맑은 고딕"/>
+              </a:rPr>
+              <a:t>0</a:t>
             </a:r>
           </a:p>
         </p:txBody>
@@ -18769,7 +22358,35 @@
                 </a:solidFill>
                 <a:latin typeface="맑은 고딕"/>
               </a:rPr>
-              <a:t>•  `Ready for Switchover:` **No**</a:t>
+              <a:t>•  </a:t>
+            </a:r>
+            <a:r>
+              <a:rPr sz="1700" b="0">
+                <a:solidFill>
+                  <a:srgbClr val="222222"/>
+                </a:solidFill>
+                <a:latin typeface="Consolas"/>
+                <a:cs typeface="Consolas"/>
+              </a:rPr>
+              <a:t>Ready for Switchover:</a:t>
+            </a:r>
+            <a:r>
+              <a:rPr sz="1700" b="0">
+                <a:solidFill>
+                  <a:srgbClr val="222222"/>
+                </a:solidFill>
+                <a:latin typeface="맑은 고딕"/>
+              </a:rPr>
+              <a:t> </a:t>
+            </a:r>
+            <a:r>
+              <a:rPr sz="1700" b="1">
+                <a:solidFill>
+                  <a:srgbClr val="222222"/>
+                </a:solidFill>
+                <a:latin typeface="맑은 고딕"/>
+              </a:rPr>
+              <a:t>No</a:t>
             </a:r>
           </a:p>
           <a:p>
@@ -18785,7 +22402,26 @@
                 </a:solidFill>
                 <a:latin typeface="맑은 고딕"/>
               </a:rPr>
-              <a:t>•  `Ready for Failover:` Yes (Primary Running)</a:t>
+              <a:t>•  </a:t>
+            </a:r>
+            <a:r>
+              <a:rPr sz="1700" b="0">
+                <a:solidFill>
+                  <a:srgbClr val="222222"/>
+                </a:solidFill>
+                <a:latin typeface="Consolas"/>
+                <a:cs typeface="Consolas"/>
+              </a:rPr>
+              <a:t>Ready for Failover:</a:t>
+            </a:r>
+            <a:r>
+              <a:rPr sz="1700" b="0">
+                <a:solidFill>
+                  <a:srgbClr val="222222"/>
+                </a:solidFill>
+                <a:latin typeface="맑은 고딕"/>
+              </a:rPr>
+              <a:t> Yes (Primary Running)</a:t>
             </a:r>
           </a:p>
           <a:p>
@@ -18801,7 +22437,35 @@
                 </a:solidFill>
                 <a:latin typeface="맑은 고딕"/>
               </a:rPr>
-              <a:t>•  속성 표에 `LogShipping ON / OFF` **한 줄만**</a:t>
+              <a:t>•  속성 표에 </a:t>
+            </a:r>
+            <a:r>
+              <a:rPr sz="1700" b="0">
+                <a:solidFill>
+                  <a:srgbClr val="222222"/>
+                </a:solidFill>
+                <a:latin typeface="Consolas"/>
+                <a:cs typeface="Consolas"/>
+              </a:rPr>
+              <a:t>LogShipping ON / OFF</a:t>
+            </a:r>
+            <a:r>
+              <a:rPr sz="1700" b="0">
+                <a:solidFill>
+                  <a:srgbClr val="222222"/>
+                </a:solidFill>
+                <a:latin typeface="맑은 고딕"/>
+              </a:rPr>
+              <a:t> </a:t>
+            </a:r>
+            <a:r>
+              <a:rPr sz="1700" b="1">
+                <a:solidFill>
+                  <a:srgbClr val="222222"/>
+                </a:solidFill>
+                <a:latin typeface="맑은 고딕"/>
+              </a:rPr>
+              <a:t>한 줄만</a:t>
             </a:r>
           </a:p>
           <a:p>
@@ -18817,7 +22481,25 @@
                 </a:solidFill>
                 <a:latin typeface="맑은 고딕"/>
               </a:rPr>
-              <a:t>•  VALIDATE 는 **값이 다른 것만** 골라 보여 준다</a:t>
+              <a:t>•  VALIDATE 는 </a:t>
+            </a:r>
+            <a:r>
+              <a:rPr sz="1700" b="1">
+                <a:solidFill>
+                  <a:srgbClr val="222222"/>
+                </a:solidFill>
+                <a:latin typeface="맑은 고딕"/>
+              </a:rPr>
+              <a:t>값이 다른 것만</a:t>
+            </a:r>
+            <a:r>
+              <a:rPr sz="1700" b="0">
+                <a:solidFill>
+                  <a:srgbClr val="222222"/>
+                </a:solidFill>
+                <a:latin typeface="맑은 고딕"/>
+              </a:rPr>
+              <a:t> 골라 보여 준다</a:t>
             </a:r>
           </a:p>
         </p:txBody>
@@ -18996,7 +22678,44 @@
                 </a:solidFill>
                 <a:latin typeface="맑은 고딕"/>
               </a:rPr>
-              <a:t>•  `LOG_ARCHIVE_DEST_STATE_2` = **RESET** (DEFER 아님)</a:t>
+              <a:t>•  </a:t>
+            </a:r>
+            <a:r>
+              <a:rPr sz="1700" b="0">
+                <a:solidFill>
+                  <a:srgbClr val="222222"/>
+                </a:solidFill>
+                <a:latin typeface="Consolas"/>
+                <a:cs typeface="Consolas"/>
+              </a:rPr>
+              <a:t>LOG_ARCHIVE_DEST_STATE_2</a:t>
+            </a:r>
+            <a:r>
+              <a:rPr sz="1700" b="0">
+                <a:solidFill>
+                  <a:srgbClr val="222222"/>
+                </a:solidFill>
+                <a:latin typeface="맑은 고딕"/>
+              </a:rPr>
+              <a:t> = </a:t>
+            </a:r>
+            <a:r>
+              <a:rPr sz="1700" b="1">
+                <a:solidFill>
+                  <a:srgbClr val="222222"/>
+                </a:solidFill>
+                <a:latin typeface="맑은 고딕"/>
+              </a:rPr>
+              <a:t>RESET</a:t>
+            </a:r>
+            <a:r>
+              <a:rPr sz="1700" b="0">
+                <a:solidFill>
+                  <a:srgbClr val="222222"/>
+                </a:solidFill>
+                <a:latin typeface="맑은 고딕"/>
+              </a:rPr>
+              <a:t> (DEFER 아님)</a:t>
             </a:r>
           </a:p>
           <a:p>
@@ -19012,7 +22731,35 @@
                 </a:solidFill>
                 <a:latin typeface="맑은 고딕"/>
               </a:rPr>
-              <a:t>•  `V$ARCHIVE_DEST_STATUS` STATUS = **DEFERRED**</a:t>
+              <a:t>•  </a:t>
+            </a:r>
+            <a:r>
+              <a:rPr sz="1700" b="0">
+                <a:solidFill>
+                  <a:srgbClr val="222222"/>
+                </a:solidFill>
+                <a:latin typeface="Consolas"/>
+                <a:cs typeface="Consolas"/>
+              </a:rPr>
+              <a:t>V$ARCHIVE_DEST_STATUS</a:t>
+            </a:r>
+            <a:r>
+              <a:rPr sz="1700" b="0">
+                <a:solidFill>
+                  <a:srgbClr val="222222"/>
+                </a:solidFill>
+                <a:latin typeface="맑은 고딕"/>
+              </a:rPr>
+              <a:t> STATUS = </a:t>
+            </a:r>
+            <a:r>
+              <a:rPr sz="1700" b="1">
+                <a:solidFill>
+                  <a:srgbClr val="222222"/>
+                </a:solidFill>
+                <a:latin typeface="맑은 고딕"/>
+              </a:rPr>
+              <a:t>DEFERRED</a:t>
             </a:r>
           </a:p>
           <a:p>
@@ -19028,7 +22775,17 @@
                 </a:solidFill>
                 <a:latin typeface="맑은 고딕"/>
               </a:rPr>
-              <a:t>•  7장에서 손으로 껐을 때는 `DEFER`</a:t>
+              <a:t>•  7장에서 손으로 껐을 때는 </a:t>
+            </a:r>
+            <a:r>
+              <a:rPr sz="1700" b="0">
+                <a:solidFill>
+                  <a:srgbClr val="222222"/>
+                </a:solidFill>
+                <a:latin typeface="Consolas"/>
+                <a:cs typeface="Consolas"/>
+              </a:rPr>
+              <a:t>DEFER</a:t>
             </a:r>
           </a:p>
           <a:p>
@@ -19044,7 +22801,25 @@
                 </a:solidFill>
                 <a:latin typeface="맑은 고딕"/>
               </a:rPr>
-              <a:t>•  값만 보고 **누가 껐는지** 구별할 수 있다</a:t>
+              <a:t>•  값만 보고 </a:t>
+            </a:r>
+            <a:r>
+              <a:rPr sz="1700" b="1">
+                <a:solidFill>
+                  <a:srgbClr val="222222"/>
+                </a:solidFill>
+                <a:latin typeface="맑은 고딕"/>
+              </a:rPr>
+              <a:t>누가 껐는지</a:t>
+            </a:r>
+            <a:r>
+              <a:rPr sz="1700" b="0">
+                <a:solidFill>
+                  <a:srgbClr val="222222"/>
+                </a:solidFill>
+                <a:latin typeface="맑은 고딕"/>
+              </a:rPr>
+              <a:t> 구별할 수 있다</a:t>
             </a:r>
           </a:p>
         </p:txBody>
@@ -19223,7 +22998,45 @@
                 </a:solidFill>
                 <a:latin typeface="맑은 고딕"/>
               </a:rPr>
-              <a:t>•  `Ready for Switchover` / `Ready for Failover` — 핵심 답</a:t>
+              <a:t>•  </a:t>
+            </a:r>
+            <a:r>
+              <a:rPr sz="1700" b="0">
+                <a:solidFill>
+                  <a:srgbClr val="222222"/>
+                </a:solidFill>
+                <a:latin typeface="Consolas"/>
+                <a:cs typeface="Consolas"/>
+              </a:rPr>
+              <a:t>Ready for Switchover</a:t>
+            </a:r>
+            <a:r>
+              <a:rPr sz="1700" b="0">
+                <a:solidFill>
+                  <a:srgbClr val="222222"/>
+                </a:solidFill>
+                <a:latin typeface="맑은 고딕"/>
+              </a:rPr>
+              <a:t> / </a:t>
+            </a:r>
+            <a:r>
+              <a:rPr sz="1700" b="0">
+                <a:solidFill>
+                  <a:srgbClr val="222222"/>
+                </a:solidFill>
+                <a:latin typeface="Consolas"/>
+                <a:cs typeface="Consolas"/>
+              </a:rPr>
+              <a:t>Ready for Failover</a:t>
+            </a:r>
+            <a:r>
+              <a:rPr sz="1700" b="0">
+                <a:solidFill>
+                  <a:srgbClr val="222222"/>
+                </a:solidFill>
+                <a:latin typeface="맑은 고딕"/>
+              </a:rPr>
+              <a:t> — 핵심 답</a:t>
             </a:r>
           </a:p>
           <a:p>
@@ -19239,7 +23052,26 @@
                 </a:solidFill>
                 <a:latin typeface="맑은 고딕"/>
               </a:rPr>
-              <a:t>•  `Flashback Database Status` — 16장 Reinstate 와 연결</a:t>
+              <a:t>•  </a:t>
+            </a:r>
+            <a:r>
+              <a:rPr sz="1700" b="0">
+                <a:solidFill>
+                  <a:srgbClr val="222222"/>
+                </a:solidFill>
+                <a:latin typeface="Consolas"/>
+                <a:cs typeface="Consolas"/>
+              </a:rPr>
+              <a:t>Flashback Database Status</a:t>
+            </a:r>
+            <a:r>
+              <a:rPr sz="1700" b="0">
+                <a:solidFill>
+                  <a:srgbClr val="222222"/>
+                </a:solidFill>
+                <a:latin typeface="맑은 고딕"/>
+              </a:rPr>
+              <a:t> — 16장 Reinstate 와 연결</a:t>
             </a:r>
           </a:p>
           <a:p>
@@ -19255,7 +23087,35 @@
                 </a:solidFill>
                 <a:latin typeface="맑은 고딕"/>
               </a:rPr>
-              <a:t>•  `static connect identifier` — **실제로 접속해 시험한다**</a:t>
+              <a:t>•  </a:t>
+            </a:r>
+            <a:r>
+              <a:rPr sz="1700" b="0">
+                <a:solidFill>
+                  <a:srgbClr val="222222"/>
+                </a:solidFill>
+                <a:latin typeface="Consolas"/>
+                <a:cs typeface="Consolas"/>
+              </a:rPr>
+              <a:t>static connect identifier</a:t>
+            </a:r>
+            <a:r>
+              <a:rPr sz="1700" b="0">
+                <a:solidFill>
+                  <a:srgbClr val="222222"/>
+                </a:solidFill>
+                <a:latin typeface="맑은 고딕"/>
+              </a:rPr>
+              <a:t> — </a:t>
+            </a:r>
+            <a:r>
+              <a:rPr sz="1700" b="1">
+                <a:solidFill>
+                  <a:srgbClr val="222222"/>
+                </a:solidFill>
+                <a:latin typeface="맑은 고딕"/>
+              </a:rPr>
+              <a:t>실제로 접속해 시험한다</a:t>
             </a:r>
           </a:p>
           <a:p>
@@ -19271,7 +23131,26 @@
                 </a:solidFill>
                 <a:latin typeface="맑은 고딕"/>
               </a:rPr>
-              <a:t>•  `Log Files Cleared` — 전환 후 쓸 로그가 준비됐는가</a:t>
+              <a:t>•  </a:t>
+            </a:r>
+            <a:r>
+              <a:rPr sz="1700" b="0">
+                <a:solidFill>
+                  <a:srgbClr val="222222"/>
+                </a:solidFill>
+                <a:latin typeface="Consolas"/>
+                <a:cs typeface="Consolas"/>
+              </a:rPr>
+              <a:t>Log Files Cleared</a:t>
+            </a:r>
+            <a:r>
+              <a:rPr sz="1700" b="0">
+                <a:solidFill>
+                  <a:srgbClr val="222222"/>
+                </a:solidFill>
+                <a:latin typeface="맑은 고딕"/>
+              </a:rPr>
+              <a:t> — 전환 후 쓸 로그가 준비됐는가</a:t>
             </a:r>
           </a:p>
           <a:p>
